--- a/yocto_training_all_session_decks/session_decks/D2S2_Recipes_Part1.pptx
+++ b/yocto_training_all_session_decks/session_decks/D2S2_Recipes_Part1.pptx
@@ -5,27 +5,27 @@
     <p:sldMasterId id="2147483648" r:id="rId1"/>
   </p:sldMasterIdLst>
   <p:notesMasterIdLst>
-    <p:notesMasterId r:id="rId8"/>
+    <p:notesMasterId r:id="rId12"/>
   </p:notesMasterIdLst>
   <p:handoutMasterIdLst>
-    <p:handoutMasterId r:id="rId9"/>
+    <p:handoutMasterId r:id="rId13"/>
   </p:handoutMasterIdLst>
   <p:sldIdLst>
-    <p:sldId id="1007" r:id="rId18"/>
-    <p:sldId id="1008" r:id="rId19"/>
-    <p:sldId id="1009" r:id="rId20"/>
-    <p:sldId id="1010" r:id="rId21"/>
-    <p:sldId id="1011" r:id="rId22"/>
-    <p:sldId id="1012" r:id="rId23"/>
-    <p:sldId id="1013" r:id="rId24"/>
-    <p:sldId id="1014" r:id="rId25"/>
-    <p:sldId id="1015" r:id="rId26"/>
-    <p:sldId id="1016" r:id="rId27"/>
+    <p:sldId id="1007" r:id="rId2"/>
+    <p:sldId id="1008" r:id="rId3"/>
+    <p:sldId id="1009" r:id="rId4"/>
+    <p:sldId id="1010" r:id="rId5"/>
+    <p:sldId id="1011" r:id="rId6"/>
+    <p:sldId id="1012" r:id="rId7"/>
+    <p:sldId id="1013" r:id="rId8"/>
+    <p:sldId id="1014" r:id="rId9"/>
+    <p:sldId id="1015" r:id="rId10"/>
+    <p:sldId id="1016" r:id="rId11"/>
   </p:sldIdLst>
   <p:sldSz cx="12192000" cy="6858000"/>
   <p:notesSz cx="6858000" cy="9144000"/>
   <p:custDataLst>
-    <p:tags r:id="rId10"/>
+    <p:tags r:id="rId14"/>
   </p:custDataLst>
   <p:defaultTextStyle>
     <a:defPPr>
@@ -2931,7 +2931,7 @@
           <a:p>
             <a:fld id="{0CEC647C-F50C-4F78-AA33-D7AA6CDA18EE}" type="datetimeFigureOut">
               <a:rPr lang="en-US" smtClean="0"/>
-              <a:t>7/13/2025</a:t>
+              <a:t>6/10/2026</a:t>
             </a:fld>
             <a:endParaRPr lang="en-US"/>
           </a:p>
@@ -3096,7 +3096,7 @@
           <a:p>
             <a:fld id="{3A83341F-E62C-483B-84B4-966F8BE46097}" type="datetimeFigureOut">
               <a:rPr lang="en-US" smtClean="0"/>
-              <a:t>7/13/2025</a:t>
+              <a:t>6/10/2026</a:t>
             </a:fld>
             <a:endParaRPr lang="en-US"/>
           </a:p>
@@ -5180,8 +5180,8 @@
 </p:sldMaster>
 </file>
 
-<file path=ppt/slides/slide10.xml><?xml version="1.0" encoding="utf-8"?>
-<p:sld xmlns:a="http://schemas.openxmlformats.org/drawingml/2006/main" xmlns:p="http://schemas.openxmlformats.org/presentationml/2006/main" xmlns:r="http://schemas.openxmlformats.org/officeDocument/2006/relationships">
+<file path=ppt/slides/slide1.xml><?xml version="1.0" encoding="utf-8"?>
+<p:sld xmlns:a="http://schemas.openxmlformats.org/drawingml/2006/main" xmlns:r="http://schemas.openxmlformats.org/officeDocument/2006/relationships" xmlns:p="http://schemas.openxmlformats.org/presentationml/2006/main">
   <p:cSld>
     <p:spTree>
       <p:nvGrpSpPr>
@@ -5189,7 +5189,113 @@
         <p:cNvGrpSpPr/>
         <p:nvPr/>
       </p:nvGrpSpPr>
-      <p:grpSpPr/>
+      <p:grpSpPr>
+        <a:xfrm>
+          <a:off x="0" y="0"/>
+          <a:ext cx="0" cy="0"/>
+          <a:chOff x="0" y="0"/>
+          <a:chExt cx="0" cy="0"/>
+        </a:xfrm>
+      </p:grpSpPr>
+      <p:sp>
+        <p:nvSpPr>
+          <p:cNvPr id="2" name="Title 1"/>
+          <p:cNvSpPr>
+            <a:spLocks noGrp="1"/>
+          </p:cNvSpPr>
+          <p:nvPr>
+            <p:ph type="ctrTitle"/>
+          </p:nvPr>
+        </p:nvSpPr>
+        <p:spPr/>
+        <p:txBody>
+          <a:bodyPr/>
+          <a:lstStyle/>
+          <a:p>
+            <a:r>
+              <a:rPr sz="4400" b="1" dirty="0">
+                <a:solidFill>
+                  <a:srgbClr val="FFFFFF"/>
+                </a:solidFill>
+                <a:latin typeface="Calibri"/>
+              </a:rPr>
+              <a:t>Recipes</a:t>
+            </a:r>
+            <a:r>
+              <a:rPr lang="en-IN" sz="4400" b="1">
+                <a:solidFill>
+                  <a:srgbClr val="FFFFFF"/>
+                </a:solidFill>
+                <a:latin typeface="Calibri"/>
+              </a:rPr>
+              <a:t>:</a:t>
+            </a:r>
+            <a:r>
+              <a:rPr sz="4400" b="1">
+                <a:solidFill>
+                  <a:srgbClr val="FFFFFF"/>
+                </a:solidFill>
+                <a:latin typeface="Calibri"/>
+              </a:rPr>
+              <a:t> Part 1</a:t>
+            </a:r>
+          </a:p>
+        </p:txBody>
+      </p:sp>
+      <p:sp>
+        <p:nvSpPr>
+          <p:cNvPr id="3" name="Subtitle 2"/>
+          <p:cNvSpPr>
+            <a:spLocks noGrp="1"/>
+          </p:cNvSpPr>
+          <p:nvPr>
+            <p:ph type="subTitle" idx="1"/>
+          </p:nvPr>
+        </p:nvSpPr>
+        <p:spPr/>
+        <p:txBody>
+          <a:bodyPr>
+            <a:normAutofit/>
+          </a:bodyPr>
+          <a:lstStyle/>
+          <a:p>
+            <a:r>
+              <a:rPr sz="1800" dirty="0">
+                <a:solidFill>
+                  <a:srgbClr val="FFFFFF"/>
+                </a:solidFill>
+                <a:latin typeface="Calibri"/>
+              </a:rPr>
+              <a:t>Workspace files and recipe anatomy</a:t>
+            </a:r>
+          </a:p>
+        </p:txBody>
+      </p:sp>
+    </p:spTree>
+  </p:cSld>
+  <p:clrMapOvr>
+    <a:masterClrMapping/>
+  </p:clrMapOvr>
+</p:sld>
+</file>
+
+<file path=ppt/slides/slide10.xml><?xml version="1.0" encoding="utf-8"?>
+<p:sld xmlns:a="http://schemas.openxmlformats.org/drawingml/2006/main" xmlns:r="http://schemas.openxmlformats.org/officeDocument/2006/relationships" xmlns:p="http://schemas.openxmlformats.org/presentationml/2006/main">
+  <p:cSld>
+    <p:spTree>
+      <p:nvGrpSpPr>
+        <p:cNvPr id="1" name=""/>
+        <p:cNvGrpSpPr/>
+        <p:nvPr/>
+      </p:nvGrpSpPr>
+      <p:grpSpPr>
+        <a:xfrm>
+          <a:off x="0" y="0"/>
+          <a:ext cx="0" cy="0"/>
+          <a:chOff x="0" y="0"/>
+          <a:chExt cx="0" cy="0"/>
+        </a:xfrm>
+      </p:grpSpPr>
       <p:sp>
         <p:nvSpPr>
           <p:cNvPr id="2" name="Title 1"/>
@@ -5208,11 +5314,11 @@
             <a:r>
               <a:rPr sz="3200" b="1">
                 <a:solidFill>
-                  <a:srgbClr val="CC0066"/>
+                  <a:srgbClr val="663399"/>
                 </a:solidFill>
                 <a:latin typeface="Calibri"/>
               </a:rPr>
-              <a:t>Distro and Machine Configs</a:t>
+              <a:t>Session Summary</a:t>
             </a:r>
           </a:p>
         </p:txBody>
@@ -5234,7 +5340,7 @@
           <a:noFill/>
         </p:spPr>
         <p:txBody>
-          <a:bodyPr wrap="square" anchor="t" lIns="45720" rIns="45720">
+          <a:bodyPr wrap="square" lIns="45720" rIns="45720" anchor="t">
             <a:spAutoFit/>
           </a:bodyPr>
           <a:lstStyle/>
@@ -5242,6 +5348,1406 @@
             <a:pPr algn="l"/>
             <a:r>
               <a:rPr sz="1500" b="0" i="1">
+                <a:solidFill>
+                  <a:srgbClr val="666666"/>
+                </a:solidFill>
+                <a:latin typeface="Calibri"/>
+              </a:rPr>
+              <a:t>5 things to remember from this session.</a:t>
+            </a:r>
+          </a:p>
+        </p:txBody>
+      </p:sp>
+      <p:sp>
+        <p:nvSpPr>
+          <p:cNvPr id="4" name="Rounded Rectangle 3"/>
+          <p:cNvSpPr/>
+          <p:nvPr/>
+        </p:nvSpPr>
+        <p:spPr>
+          <a:xfrm>
+            <a:off x="822960" y="1874519"/>
+            <a:ext cx="457200" cy="548640"/>
+          </a:xfrm>
+          <a:prstGeom prst="roundRect">
+            <a:avLst/>
+          </a:prstGeom>
+          <a:solidFill>
+            <a:srgbClr val="CC0066"/>
+          </a:solidFill>
+          <a:ln>
+            <a:noFill/>
+          </a:ln>
+          <a:effectLst/>
+        </p:spPr>
+        <p:style>
+          <a:lnRef idx="1">
+            <a:schemeClr val="accent1"/>
+          </a:lnRef>
+          <a:fillRef idx="3">
+            <a:schemeClr val="accent1"/>
+          </a:fillRef>
+          <a:effectRef idx="2">
+            <a:schemeClr val="accent1"/>
+          </a:effectRef>
+          <a:fontRef idx="minor">
+            <a:schemeClr val="lt1"/>
+          </a:fontRef>
+        </p:style>
+        <p:txBody>
+          <a:bodyPr lIns="0" rIns="0" rtlCol="0" anchor="ctr"/>
+          <a:lstStyle/>
+          <a:p>
+            <a:pPr algn="ctr"/>
+            <a:r>
+              <a:rPr sz="2200" b="1">
+                <a:solidFill>
+                  <a:srgbClr val="FFFFFF"/>
+                </a:solidFill>
+                <a:latin typeface="Calibri"/>
+              </a:rPr>
+              <a:t>1</a:t>
+            </a:r>
+          </a:p>
+        </p:txBody>
+      </p:sp>
+      <p:sp>
+        <p:nvSpPr>
+          <p:cNvPr id="5" name="TextBox 4"/>
+          <p:cNvSpPr txBox="1"/>
+          <p:nvPr/>
+        </p:nvSpPr>
+        <p:spPr>
+          <a:xfrm>
+            <a:off x="1417320" y="1874519"/>
+            <a:ext cx="10058400" cy="320040"/>
+          </a:xfrm>
+          <a:prstGeom prst="rect">
+            <a:avLst/>
+          </a:prstGeom>
+          <a:noFill/>
+        </p:spPr>
+        <p:txBody>
+          <a:bodyPr wrap="square" lIns="45720" rIns="45720" anchor="t">
+            <a:spAutoFit/>
+          </a:bodyPr>
+          <a:lstStyle/>
+          <a:p>
+            <a:pPr algn="l"/>
+            <a:r>
+              <a:rPr sz="1600" b="1" i="0">
+                <a:solidFill>
+                  <a:srgbClr val="663399"/>
+                </a:solidFill>
+                <a:latin typeface="Calibri"/>
+              </a:rPr>
+              <a:t>local.conf, bblayers.conf are your build cockpit</a:t>
+            </a:r>
+          </a:p>
+        </p:txBody>
+      </p:sp>
+      <p:sp>
+        <p:nvSpPr>
+          <p:cNvPr id="6" name="TextBox 5"/>
+          <p:cNvSpPr txBox="1"/>
+          <p:nvPr/>
+        </p:nvSpPr>
+        <p:spPr>
+          <a:xfrm>
+            <a:off x="1417320" y="2185415"/>
+            <a:ext cx="10058400" cy="320040"/>
+          </a:xfrm>
+          <a:prstGeom prst="rect">
+            <a:avLst/>
+          </a:prstGeom>
+          <a:noFill/>
+        </p:spPr>
+        <p:txBody>
+          <a:bodyPr wrap="square" lIns="45720" rIns="45720" anchor="t">
+            <a:spAutoFit/>
+          </a:bodyPr>
+          <a:lstStyle/>
+          <a:p>
+            <a:pPr algn="l"/>
+            <a:r>
+              <a:rPr sz="1300" b="0" i="0">
+                <a:solidFill>
+                  <a:srgbClr val="333333"/>
+                </a:solidFill>
+                <a:latin typeface="Calibri"/>
+              </a:rPr>
+              <a:t>Distro and machine configs are reusable policy + hardware</a:t>
+            </a:r>
+          </a:p>
+        </p:txBody>
+      </p:sp>
+      <p:sp>
+        <p:nvSpPr>
+          <p:cNvPr id="7" name="Rounded Rectangle 6"/>
+          <p:cNvSpPr/>
+          <p:nvPr/>
+        </p:nvSpPr>
+        <p:spPr>
+          <a:xfrm>
+            <a:off x="822960" y="2587752"/>
+            <a:ext cx="457200" cy="548640"/>
+          </a:xfrm>
+          <a:prstGeom prst="roundRect">
+            <a:avLst/>
+          </a:prstGeom>
+          <a:solidFill>
+            <a:srgbClr val="CC0066"/>
+          </a:solidFill>
+          <a:ln>
+            <a:noFill/>
+          </a:ln>
+          <a:effectLst/>
+        </p:spPr>
+        <p:style>
+          <a:lnRef idx="1">
+            <a:schemeClr val="accent1"/>
+          </a:lnRef>
+          <a:fillRef idx="3">
+            <a:schemeClr val="accent1"/>
+          </a:fillRef>
+          <a:effectRef idx="2">
+            <a:schemeClr val="accent1"/>
+          </a:effectRef>
+          <a:fontRef idx="minor">
+            <a:schemeClr val="lt1"/>
+          </a:fontRef>
+        </p:style>
+        <p:txBody>
+          <a:bodyPr lIns="0" rIns="0" rtlCol="0" anchor="ctr"/>
+          <a:lstStyle/>
+          <a:p>
+            <a:pPr algn="ctr"/>
+            <a:r>
+              <a:rPr sz="2200" b="1">
+                <a:solidFill>
+                  <a:srgbClr val="FFFFFF"/>
+                </a:solidFill>
+                <a:latin typeface="Calibri"/>
+              </a:rPr>
+              <a:t>2</a:t>
+            </a:r>
+          </a:p>
+        </p:txBody>
+      </p:sp>
+      <p:sp>
+        <p:nvSpPr>
+          <p:cNvPr id="8" name="TextBox 7"/>
+          <p:cNvSpPr txBox="1"/>
+          <p:nvPr/>
+        </p:nvSpPr>
+        <p:spPr>
+          <a:xfrm>
+            <a:off x="1417320" y="2587752"/>
+            <a:ext cx="10058400" cy="320040"/>
+          </a:xfrm>
+          <a:prstGeom prst="rect">
+            <a:avLst/>
+          </a:prstGeom>
+          <a:noFill/>
+        </p:spPr>
+        <p:txBody>
+          <a:bodyPr wrap="square" lIns="45720" rIns="45720" anchor="t">
+            <a:spAutoFit/>
+          </a:bodyPr>
+          <a:lstStyle/>
+          <a:p>
+            <a:pPr algn="l"/>
+            <a:r>
+              <a:rPr sz="1600" b="1" i="0">
+                <a:solidFill>
+                  <a:srgbClr val="663399"/>
+                </a:solidFill>
+                <a:latin typeface="Calibri"/>
+              </a:rPr>
+              <a:t>Every recipe has the same skeleton</a:t>
+            </a:r>
+          </a:p>
+        </p:txBody>
+      </p:sp>
+      <p:sp>
+        <p:nvSpPr>
+          <p:cNvPr id="9" name="TextBox 8"/>
+          <p:cNvSpPr txBox="1"/>
+          <p:nvPr/>
+        </p:nvSpPr>
+        <p:spPr>
+          <a:xfrm>
+            <a:off x="1417320" y="2898648"/>
+            <a:ext cx="10058400" cy="320040"/>
+          </a:xfrm>
+          <a:prstGeom prst="rect">
+            <a:avLst/>
+          </a:prstGeom>
+          <a:noFill/>
+        </p:spPr>
+        <p:txBody>
+          <a:bodyPr wrap="square" lIns="45720" rIns="45720" anchor="t">
+            <a:spAutoFit/>
+          </a:bodyPr>
+          <a:lstStyle/>
+          <a:p>
+            <a:pPr algn="l"/>
+            <a:r>
+              <a:rPr sz="1300" b="0" i="0">
+                <a:solidFill>
+                  <a:srgbClr val="333333"/>
+                </a:solidFill>
+                <a:latin typeface="Calibri"/>
+              </a:rPr>
+              <a:t>Metadata, SRC_URI, S, dependencies, do_install</a:t>
+            </a:r>
+          </a:p>
+        </p:txBody>
+      </p:sp>
+      <p:sp>
+        <p:nvSpPr>
+          <p:cNvPr id="10" name="Rounded Rectangle 9"/>
+          <p:cNvSpPr/>
+          <p:nvPr/>
+        </p:nvSpPr>
+        <p:spPr>
+          <a:xfrm>
+            <a:off x="822960" y="3300984"/>
+            <a:ext cx="457200" cy="548640"/>
+          </a:xfrm>
+          <a:prstGeom prst="roundRect">
+            <a:avLst/>
+          </a:prstGeom>
+          <a:solidFill>
+            <a:srgbClr val="CC0066"/>
+          </a:solidFill>
+          <a:ln>
+            <a:noFill/>
+          </a:ln>
+          <a:effectLst/>
+        </p:spPr>
+        <p:style>
+          <a:lnRef idx="1">
+            <a:schemeClr val="accent1"/>
+          </a:lnRef>
+          <a:fillRef idx="3">
+            <a:schemeClr val="accent1"/>
+          </a:fillRef>
+          <a:effectRef idx="2">
+            <a:schemeClr val="accent1"/>
+          </a:effectRef>
+          <a:fontRef idx="minor">
+            <a:schemeClr val="lt1"/>
+          </a:fontRef>
+        </p:style>
+        <p:txBody>
+          <a:bodyPr lIns="0" rIns="0" rtlCol="0" anchor="ctr"/>
+          <a:lstStyle/>
+          <a:p>
+            <a:pPr algn="ctr"/>
+            <a:r>
+              <a:rPr sz="2200" b="1">
+                <a:solidFill>
+                  <a:srgbClr val="FFFFFF"/>
+                </a:solidFill>
+                <a:latin typeface="Calibri"/>
+              </a:rPr>
+              <a:t>3</a:t>
+            </a:r>
+          </a:p>
+        </p:txBody>
+      </p:sp>
+      <p:sp>
+        <p:nvSpPr>
+          <p:cNvPr id="11" name="TextBox 10"/>
+          <p:cNvSpPr txBox="1"/>
+          <p:nvPr/>
+        </p:nvSpPr>
+        <p:spPr>
+          <a:xfrm>
+            <a:off x="1417320" y="3300984"/>
+            <a:ext cx="10058400" cy="320040"/>
+          </a:xfrm>
+          <a:prstGeom prst="rect">
+            <a:avLst/>
+          </a:prstGeom>
+          <a:noFill/>
+        </p:spPr>
+        <p:txBody>
+          <a:bodyPr wrap="square" lIns="45720" rIns="45720" anchor="t">
+            <a:spAutoFit/>
+          </a:bodyPr>
+          <a:lstStyle/>
+          <a:p>
+            <a:pPr algn="l"/>
+            <a:r>
+              <a:rPr sz="1600" b="1" i="0">
+                <a:solidFill>
+                  <a:srgbClr val="663399"/>
+                </a:solidFill>
+                <a:latin typeface="Calibri"/>
+              </a:rPr>
+              <a:t>SRC_URI fetches; SRC_URI[sha256sum] verifies</a:t>
+            </a:r>
+          </a:p>
+        </p:txBody>
+      </p:sp>
+      <p:sp>
+        <p:nvSpPr>
+          <p:cNvPr id="12" name="TextBox 11"/>
+          <p:cNvSpPr txBox="1"/>
+          <p:nvPr/>
+        </p:nvSpPr>
+        <p:spPr>
+          <a:xfrm>
+            <a:off x="1417320" y="3611879"/>
+            <a:ext cx="10058400" cy="320040"/>
+          </a:xfrm>
+          <a:prstGeom prst="rect">
+            <a:avLst/>
+          </a:prstGeom>
+          <a:noFill/>
+        </p:spPr>
+        <p:txBody>
+          <a:bodyPr wrap="square" lIns="45720" rIns="45720" anchor="t">
+            <a:spAutoFit/>
+          </a:bodyPr>
+          <a:lstStyle/>
+          <a:p>
+            <a:pPr algn="l"/>
+            <a:r>
+              <a:rPr sz="1300" b="0" i="0">
+                <a:solidFill>
+                  <a:srgbClr val="333333"/>
+                </a:solidFill>
+                <a:latin typeface="Calibri"/>
+              </a:rPr>
+              <a:t>Multiple sources can be combined; patches apply automatically</a:t>
+            </a:r>
+          </a:p>
+        </p:txBody>
+      </p:sp>
+      <p:sp>
+        <p:nvSpPr>
+          <p:cNvPr id="13" name="Rounded Rectangle 12"/>
+          <p:cNvSpPr/>
+          <p:nvPr/>
+        </p:nvSpPr>
+        <p:spPr>
+          <a:xfrm>
+            <a:off x="822960" y="4014215"/>
+            <a:ext cx="457200" cy="548640"/>
+          </a:xfrm>
+          <a:prstGeom prst="roundRect">
+            <a:avLst/>
+          </a:prstGeom>
+          <a:solidFill>
+            <a:srgbClr val="CC0066"/>
+          </a:solidFill>
+          <a:ln>
+            <a:noFill/>
+          </a:ln>
+          <a:effectLst/>
+        </p:spPr>
+        <p:style>
+          <a:lnRef idx="1">
+            <a:schemeClr val="accent1"/>
+          </a:lnRef>
+          <a:fillRef idx="3">
+            <a:schemeClr val="accent1"/>
+          </a:fillRef>
+          <a:effectRef idx="2">
+            <a:schemeClr val="accent1"/>
+          </a:effectRef>
+          <a:fontRef idx="minor">
+            <a:schemeClr val="lt1"/>
+          </a:fontRef>
+        </p:style>
+        <p:txBody>
+          <a:bodyPr lIns="0" rIns="0" rtlCol="0" anchor="ctr"/>
+          <a:lstStyle/>
+          <a:p>
+            <a:pPr algn="ctr"/>
+            <a:r>
+              <a:rPr sz="2200" b="1">
+                <a:solidFill>
+                  <a:srgbClr val="FFFFFF"/>
+                </a:solidFill>
+                <a:latin typeface="Calibri"/>
+              </a:rPr>
+              <a:t>4</a:t>
+            </a:r>
+          </a:p>
+        </p:txBody>
+      </p:sp>
+      <p:sp>
+        <p:nvSpPr>
+          <p:cNvPr id="14" name="TextBox 13"/>
+          <p:cNvSpPr txBox="1"/>
+          <p:nvPr/>
+        </p:nvSpPr>
+        <p:spPr>
+          <a:xfrm>
+            <a:off x="1417320" y="4014215"/>
+            <a:ext cx="10058400" cy="320040"/>
+          </a:xfrm>
+          <a:prstGeom prst="rect">
+            <a:avLst/>
+          </a:prstGeom>
+          <a:noFill/>
+        </p:spPr>
+        <p:txBody>
+          <a:bodyPr wrap="square" lIns="45720" rIns="45720" anchor="t">
+            <a:spAutoFit/>
+          </a:bodyPr>
+          <a:lstStyle/>
+          <a:p>
+            <a:pPr algn="l"/>
+            <a:r>
+              <a:rPr sz="1600" b="1" i="0">
+                <a:solidFill>
+                  <a:srgbClr val="663399"/>
+                </a:solidFill>
+                <a:latin typeface="Calibri"/>
+              </a:rPr>
+              <a:t>do_install populates ${D}; FILES decides what ships</a:t>
+            </a:r>
+          </a:p>
+        </p:txBody>
+      </p:sp>
+      <p:sp>
+        <p:nvSpPr>
+          <p:cNvPr id="15" name="TextBox 14"/>
+          <p:cNvSpPr txBox="1"/>
+          <p:nvPr/>
+        </p:nvSpPr>
+        <p:spPr>
+          <a:xfrm>
+            <a:off x="1417320" y="4325112"/>
+            <a:ext cx="10058400" cy="320040"/>
+          </a:xfrm>
+          <a:prstGeom prst="rect">
+            <a:avLst/>
+          </a:prstGeom>
+          <a:noFill/>
+        </p:spPr>
+        <p:txBody>
+          <a:bodyPr wrap="square" lIns="45720" rIns="45720" anchor="t">
+            <a:spAutoFit/>
+          </a:bodyPr>
+          <a:lstStyle/>
+          <a:p>
+            <a:pPr algn="l"/>
+            <a:r>
+              <a:rPr sz="1300" b="0" i="0">
+                <a:solidFill>
+                  <a:srgbClr val="333333"/>
+                </a:solidFill>
+                <a:latin typeface="Calibri"/>
+              </a:rPr>
+              <a:t>Mismatch produces QA warnings — read them, don't ignore</a:t>
+            </a:r>
+          </a:p>
+        </p:txBody>
+      </p:sp>
+      <p:sp>
+        <p:nvSpPr>
+          <p:cNvPr id="16" name="Rounded Rectangle 15"/>
+          <p:cNvSpPr/>
+          <p:nvPr/>
+        </p:nvSpPr>
+        <p:spPr>
+          <a:xfrm>
+            <a:off x="822960" y="4727448"/>
+            <a:ext cx="457200" cy="548640"/>
+          </a:xfrm>
+          <a:prstGeom prst="roundRect">
+            <a:avLst/>
+          </a:prstGeom>
+          <a:solidFill>
+            <a:srgbClr val="CC0066"/>
+          </a:solidFill>
+          <a:ln>
+            <a:noFill/>
+          </a:ln>
+          <a:effectLst/>
+        </p:spPr>
+        <p:style>
+          <a:lnRef idx="1">
+            <a:schemeClr val="accent1"/>
+          </a:lnRef>
+          <a:fillRef idx="3">
+            <a:schemeClr val="accent1"/>
+          </a:fillRef>
+          <a:effectRef idx="2">
+            <a:schemeClr val="accent1"/>
+          </a:effectRef>
+          <a:fontRef idx="minor">
+            <a:schemeClr val="lt1"/>
+          </a:fontRef>
+        </p:style>
+        <p:txBody>
+          <a:bodyPr lIns="0" rIns="0" rtlCol="0" anchor="ctr"/>
+          <a:lstStyle/>
+          <a:p>
+            <a:pPr algn="ctr"/>
+            <a:r>
+              <a:rPr sz="2200" b="1">
+                <a:solidFill>
+                  <a:srgbClr val="FFFFFF"/>
+                </a:solidFill>
+                <a:latin typeface="Calibri"/>
+              </a:rPr>
+              <a:t>5</a:t>
+            </a:r>
+          </a:p>
+        </p:txBody>
+      </p:sp>
+      <p:sp>
+        <p:nvSpPr>
+          <p:cNvPr id="17" name="TextBox 16"/>
+          <p:cNvSpPr txBox="1"/>
+          <p:nvPr/>
+        </p:nvSpPr>
+        <p:spPr>
+          <a:xfrm>
+            <a:off x="1417320" y="4727448"/>
+            <a:ext cx="10058400" cy="320040"/>
+          </a:xfrm>
+          <a:prstGeom prst="rect">
+            <a:avLst/>
+          </a:prstGeom>
+          <a:noFill/>
+        </p:spPr>
+        <p:txBody>
+          <a:bodyPr wrap="square" lIns="45720" rIns="45720" anchor="t">
+            <a:spAutoFit/>
+          </a:bodyPr>
+          <a:lstStyle/>
+          <a:p>
+            <a:pPr algn="l"/>
+            <a:r>
+              <a:rPr sz="1600" b="1" i="0">
+                <a:solidFill>
+                  <a:srgbClr val="663399"/>
+                </a:solidFill>
+                <a:latin typeface="Calibri"/>
+              </a:rPr>
+              <a:t>DEPENDS = build; RDEPENDS = runtime</a:t>
+            </a:r>
+          </a:p>
+        </p:txBody>
+      </p:sp>
+      <p:sp>
+        <p:nvSpPr>
+          <p:cNvPr id="18" name="TextBox 17"/>
+          <p:cNvSpPr txBox="1"/>
+          <p:nvPr/>
+        </p:nvSpPr>
+        <p:spPr>
+          <a:xfrm>
+            <a:off x="1417320" y="5038344"/>
+            <a:ext cx="10058400" cy="320040"/>
+          </a:xfrm>
+          <a:prstGeom prst="rect">
+            <a:avLst/>
+          </a:prstGeom>
+          <a:noFill/>
+        </p:spPr>
+        <p:txBody>
+          <a:bodyPr wrap="square" lIns="45720" rIns="45720" anchor="t">
+            <a:spAutoFit/>
+          </a:bodyPr>
+          <a:lstStyle/>
+          <a:p>
+            <a:pPr algn="l"/>
+            <a:r>
+              <a:rPr sz="1300" b="0" i="0">
+                <a:solidFill>
+                  <a:srgbClr val="333333"/>
+                </a:solidFill>
+                <a:latin typeface="Calibri"/>
+              </a:rPr>
+              <a:t>Both are needed for a properly functioning shipped binary</a:t>
+            </a:r>
+          </a:p>
+        </p:txBody>
+      </p:sp>
+      <p:sp>
+        <p:nvSpPr>
+          <p:cNvPr id="19" name="Rounded Rectangle 18"/>
+          <p:cNvSpPr/>
+          <p:nvPr/>
+        </p:nvSpPr>
+        <p:spPr>
+          <a:xfrm>
+            <a:off x="822960" y="5669280"/>
+            <a:ext cx="10561320" cy="640080"/>
+          </a:xfrm>
+          <a:prstGeom prst="roundRect">
+            <a:avLst/>
+          </a:prstGeom>
+          <a:solidFill>
+            <a:srgbClr val="FBE6F0"/>
+          </a:solidFill>
+          <a:ln>
+            <a:noFill/>
+          </a:ln>
+          <a:effectLst/>
+        </p:spPr>
+        <p:style>
+          <a:lnRef idx="1">
+            <a:schemeClr val="accent1"/>
+          </a:lnRef>
+          <a:fillRef idx="3">
+            <a:schemeClr val="accent1"/>
+          </a:fillRef>
+          <a:effectRef idx="2">
+            <a:schemeClr val="accent1"/>
+          </a:effectRef>
+          <a:fontRef idx="minor">
+            <a:schemeClr val="lt1"/>
+          </a:fontRef>
+        </p:style>
+        <p:txBody>
+          <a:bodyPr lIns="228600" rtlCol="0" anchor="ctr"/>
+          <a:lstStyle/>
+          <a:p>
+            <a:pPr algn="ctr"/>
+            <a:r>
+              <a:rPr sz="1400" b="1">
+                <a:solidFill>
+                  <a:srgbClr val="663399"/>
+                </a:solidFill>
+                <a:latin typeface="Calibri"/>
+              </a:rPr>
+              <a:t>Next session  →  </a:t>
+            </a:r>
+            <a:r>
+              <a:rPr sz="1400">
+                <a:solidFill>
+                  <a:srgbClr val="333333"/>
+                </a:solidFill>
+                <a:latin typeface="Calibri"/>
+              </a:rPr>
+              <a:t>Recipes — Part 2 (60 min) — packaging and image composition</a:t>
+            </a:r>
+          </a:p>
+        </p:txBody>
+      </p:sp>
+    </p:spTree>
+  </p:cSld>
+  <p:clrMapOvr>
+    <a:masterClrMapping/>
+  </p:clrMapOvr>
+</p:sld>
+</file>
+
+<file path=ppt/slides/slide2.xml><?xml version="1.0" encoding="utf-8"?>
+<p:sld xmlns:a="http://schemas.openxmlformats.org/drawingml/2006/main" xmlns:r="http://schemas.openxmlformats.org/officeDocument/2006/relationships" xmlns:p="http://schemas.openxmlformats.org/presentationml/2006/main">
+  <p:cSld>
+    <p:spTree>
+      <p:nvGrpSpPr>
+        <p:cNvPr id="1" name=""/>
+        <p:cNvGrpSpPr/>
+        <p:nvPr/>
+      </p:nvGrpSpPr>
+      <p:grpSpPr>
+        <a:xfrm>
+          <a:off x="0" y="0"/>
+          <a:ext cx="0" cy="0"/>
+          <a:chOff x="0" y="0"/>
+          <a:chExt cx="0" cy="0"/>
+        </a:xfrm>
+      </p:grpSpPr>
+      <p:sp>
+        <p:nvSpPr>
+          <p:cNvPr id="2" name="Title 1"/>
+          <p:cNvSpPr>
+            <a:spLocks noGrp="1"/>
+          </p:cNvSpPr>
+          <p:nvPr>
+            <p:ph type="title"/>
+          </p:nvPr>
+        </p:nvSpPr>
+        <p:spPr/>
+        <p:txBody>
+          <a:bodyPr/>
+          <a:lstStyle/>
+          <a:p>
+            <a:r>
+              <a:rPr sz="3200" b="1" dirty="0">
+                <a:latin typeface="Calibri"/>
+              </a:rPr>
+              <a:t>Session Agenda</a:t>
+            </a:r>
+          </a:p>
+        </p:txBody>
+      </p:sp>
+      <p:sp>
+        <p:nvSpPr>
+          <p:cNvPr id="3" name="TextBox 2"/>
+          <p:cNvSpPr txBox="1"/>
+          <p:nvPr/>
+        </p:nvSpPr>
+        <p:spPr>
+          <a:xfrm>
+            <a:off x="822960" y="1463040"/>
+            <a:ext cx="10515600" cy="5029200"/>
+          </a:xfrm>
+          <a:prstGeom prst="rect">
+            <a:avLst/>
+          </a:prstGeom>
+          <a:noFill/>
+        </p:spPr>
+        <p:txBody>
+          <a:bodyPr wrap="square" lIns="45720" rIns="45720">
+            <a:spAutoFit/>
+          </a:bodyPr>
+          <a:lstStyle/>
+          <a:p>
+            <a:pPr>
+              <a:spcAft>
+                <a:spcPts val="600"/>
+              </a:spcAft>
+            </a:pPr>
+            <a:r>
+              <a:rPr sz="2000" b="0" i="0">
+                <a:solidFill>
+                  <a:srgbClr val="333333"/>
+                </a:solidFill>
+                <a:latin typeface="Calibri"/>
+              </a:rPr>
+              <a:t>1.  Workspace files: local.conf, bblayers.conf</a:t>
+            </a:r>
+          </a:p>
+          <a:p>
+            <a:pPr>
+              <a:spcAft>
+                <a:spcPts val="600"/>
+              </a:spcAft>
+            </a:pPr>
+            <a:r>
+              <a:rPr sz="2000" b="0" i="0">
+                <a:solidFill>
+                  <a:srgbClr val="333333"/>
+                </a:solidFill>
+                <a:latin typeface="Calibri"/>
+              </a:rPr>
+              <a:t>2.  Distro and machine config files</a:t>
+            </a:r>
+          </a:p>
+          <a:p>
+            <a:pPr>
+              <a:spcAft>
+                <a:spcPts val="600"/>
+              </a:spcAft>
+            </a:pPr>
+            <a:r>
+              <a:rPr sz="2000" b="0" i="0">
+                <a:solidFill>
+                  <a:srgbClr val="333333"/>
+                </a:solidFill>
+                <a:latin typeface="Calibri"/>
+              </a:rPr>
+              <a:t>3.  Anatomy of a recipe</a:t>
+            </a:r>
+          </a:p>
+          <a:p>
+            <a:pPr>
+              <a:spcAft>
+                <a:spcPts val="600"/>
+              </a:spcAft>
+            </a:pPr>
+            <a:r>
+              <a:rPr sz="2000" b="0" i="0">
+                <a:solidFill>
+                  <a:srgbClr val="333333"/>
+                </a:solidFill>
+                <a:latin typeface="Calibri"/>
+              </a:rPr>
+              <a:t>4.  SRC_URI — fetching source</a:t>
+            </a:r>
+          </a:p>
+          <a:p>
+            <a:pPr>
+              <a:spcAft>
+                <a:spcPts val="600"/>
+              </a:spcAft>
+            </a:pPr>
+            <a:r>
+              <a:rPr sz="2000" b="0" i="0">
+                <a:solidFill>
+                  <a:srgbClr val="333333"/>
+                </a:solidFill>
+                <a:latin typeface="Calibri"/>
+              </a:rPr>
+              <a:t>5.  Patches and SRC_URI checksums</a:t>
+            </a:r>
+          </a:p>
+          <a:p>
+            <a:pPr>
+              <a:spcAft>
+                <a:spcPts val="600"/>
+              </a:spcAft>
+            </a:pPr>
+            <a:r>
+              <a:rPr sz="2000" b="0" i="0">
+                <a:solidFill>
+                  <a:srgbClr val="333333"/>
+                </a:solidFill>
+                <a:latin typeface="Calibri"/>
+              </a:rPr>
+              <a:t>6.  do_install and FILES</a:t>
+            </a:r>
+          </a:p>
+          <a:p>
+            <a:pPr>
+              <a:spcAft>
+                <a:spcPts val="600"/>
+              </a:spcAft>
+            </a:pPr>
+            <a:r>
+              <a:rPr sz="2000" b="0" i="0">
+                <a:solidFill>
+                  <a:srgbClr val="333333"/>
+                </a:solidFill>
+                <a:latin typeface="Calibri"/>
+              </a:rPr>
+              <a:t>7.  RDEPENDS and DEPENDS</a:t>
+            </a:r>
+          </a:p>
+        </p:txBody>
+      </p:sp>
+    </p:spTree>
+  </p:cSld>
+  <p:clrMapOvr>
+    <a:masterClrMapping/>
+  </p:clrMapOvr>
+</p:sld>
+</file>
+
+<file path=ppt/slides/slide3.xml><?xml version="1.0" encoding="utf-8"?>
+<p:sld xmlns:a="http://schemas.openxmlformats.org/drawingml/2006/main" xmlns:r="http://schemas.openxmlformats.org/officeDocument/2006/relationships" xmlns:p="http://schemas.openxmlformats.org/presentationml/2006/main">
+  <p:cSld>
+    <p:spTree>
+      <p:nvGrpSpPr>
+        <p:cNvPr id="1" name=""/>
+        <p:cNvGrpSpPr/>
+        <p:nvPr/>
+      </p:nvGrpSpPr>
+      <p:grpSpPr>
+        <a:xfrm>
+          <a:off x="0" y="0"/>
+          <a:ext cx="0" cy="0"/>
+          <a:chOff x="0" y="0"/>
+          <a:chExt cx="0" cy="0"/>
+        </a:xfrm>
+      </p:grpSpPr>
+      <p:sp>
+        <p:nvSpPr>
+          <p:cNvPr id="2" name="Title 1"/>
+          <p:cNvSpPr>
+            <a:spLocks noGrp="1"/>
+          </p:cNvSpPr>
+          <p:nvPr>
+            <p:ph type="title"/>
+          </p:nvPr>
+        </p:nvSpPr>
+        <p:spPr/>
+        <p:txBody>
+          <a:bodyPr/>
+          <a:lstStyle/>
+          <a:p>
+            <a:r>
+              <a:rPr sz="3200" b="1" dirty="0">
+                <a:latin typeface="Calibri"/>
+              </a:rPr>
+              <a:t>Workspace Files</a:t>
+            </a:r>
+          </a:p>
+        </p:txBody>
+      </p:sp>
+      <p:sp>
+        <p:nvSpPr>
+          <p:cNvPr id="3" name="TextBox 2"/>
+          <p:cNvSpPr txBox="1"/>
+          <p:nvPr/>
+        </p:nvSpPr>
+        <p:spPr>
+          <a:xfrm>
+            <a:off x="822960" y="1417320"/>
+            <a:ext cx="10515600" cy="365760"/>
+          </a:xfrm>
+          <a:prstGeom prst="rect">
+            <a:avLst/>
+          </a:prstGeom>
+          <a:noFill/>
+        </p:spPr>
+        <p:txBody>
+          <a:bodyPr wrap="square" lIns="45720" rIns="45720" anchor="t">
+            <a:spAutoFit/>
+          </a:bodyPr>
+          <a:lstStyle/>
+          <a:p>
+            <a:pPr algn="l"/>
+            <a:r>
+              <a:rPr sz="1500" b="0" i="1">
+                <a:solidFill>
+                  <a:srgbClr val="666666"/>
+                </a:solidFill>
+                <a:latin typeface="Calibri"/>
+              </a:rPr>
+              <a:t>Three config files that shape your build.</a:t>
+            </a:r>
+          </a:p>
+        </p:txBody>
+      </p:sp>
+      <p:sp>
+        <p:nvSpPr>
+          <p:cNvPr id="4" name="Rounded Rectangle 3"/>
+          <p:cNvSpPr/>
+          <p:nvPr/>
+        </p:nvSpPr>
+        <p:spPr>
+          <a:xfrm>
+            <a:off x="822960" y="1783080"/>
+            <a:ext cx="10515600" cy="4389120"/>
+          </a:xfrm>
+          <a:prstGeom prst="roundRect">
+            <a:avLst/>
+          </a:prstGeom>
+          <a:solidFill>
+            <a:srgbClr val="F5F5F5"/>
+          </a:solidFill>
+          <a:ln w="6350">
+            <a:solidFill>
+              <a:srgbClr val="D0D0D0"/>
+            </a:solidFill>
+          </a:ln>
+          <a:effectLst/>
+        </p:spPr>
+        <p:style>
+          <a:lnRef idx="1">
+            <a:schemeClr val="accent1"/>
+          </a:lnRef>
+          <a:fillRef idx="3">
+            <a:schemeClr val="accent1"/>
+          </a:fillRef>
+          <a:effectRef idx="2">
+            <a:schemeClr val="accent1"/>
+          </a:effectRef>
+          <a:fontRef idx="minor">
+            <a:schemeClr val="lt1"/>
+          </a:fontRef>
+        </p:style>
+        <p:txBody>
+          <a:bodyPr rtlCol="0" anchor="ctr"/>
+          <a:lstStyle/>
+          <a:p>
+            <a:pPr algn="ctr"/>
+            <a:endParaRPr/>
+          </a:p>
+        </p:txBody>
+      </p:sp>
+      <p:sp>
+        <p:nvSpPr>
+          <p:cNvPr id="5" name="Rectangle 4"/>
+          <p:cNvSpPr/>
+          <p:nvPr/>
+        </p:nvSpPr>
+        <p:spPr>
+          <a:xfrm>
+            <a:off x="822960" y="1783080"/>
+            <a:ext cx="73152" cy="4389120"/>
+          </a:xfrm>
+          <a:prstGeom prst="rect">
+            <a:avLst/>
+          </a:prstGeom>
+          <a:solidFill>
+            <a:srgbClr val="CC0066"/>
+          </a:solidFill>
+          <a:ln>
+            <a:noFill/>
+          </a:ln>
+          <a:effectLst/>
+        </p:spPr>
+        <p:style>
+          <a:lnRef idx="1">
+            <a:schemeClr val="accent1"/>
+          </a:lnRef>
+          <a:fillRef idx="3">
+            <a:schemeClr val="accent1"/>
+          </a:fillRef>
+          <a:effectRef idx="2">
+            <a:schemeClr val="accent1"/>
+          </a:effectRef>
+          <a:fontRef idx="minor">
+            <a:schemeClr val="lt1"/>
+          </a:fontRef>
+        </p:style>
+        <p:txBody>
+          <a:bodyPr rtlCol="0" anchor="ctr"/>
+          <a:lstStyle/>
+          <a:p>
+            <a:pPr algn="ctr"/>
+            <a:endParaRPr/>
+          </a:p>
+        </p:txBody>
+      </p:sp>
+      <p:sp>
+        <p:nvSpPr>
+          <p:cNvPr id="6" name="TextBox 5"/>
+          <p:cNvSpPr txBox="1"/>
+          <p:nvPr/>
+        </p:nvSpPr>
+        <p:spPr>
+          <a:xfrm>
+            <a:off x="1005840" y="1874519"/>
+            <a:ext cx="10241280" cy="4031873"/>
+          </a:xfrm>
+          <a:prstGeom prst="rect">
+            <a:avLst/>
+          </a:prstGeom>
+          <a:noFill/>
+        </p:spPr>
+        <p:txBody>
+          <a:bodyPr wrap="square" lIns="45720" rIns="45720">
+            <a:spAutoFit/>
+          </a:bodyPr>
+          <a:lstStyle/>
+          <a:p>
+            <a:pPr>
+              <a:spcAft>
+                <a:spcPts val="0"/>
+              </a:spcAft>
+            </a:pPr>
+            <a:r>
+              <a:rPr sz="1600">
+                <a:solidFill>
+                  <a:srgbClr val="2D2D2D"/>
+                </a:solidFill>
+                <a:latin typeface="Consolas"/>
+              </a:rPr>
+              <a:t>build/conf/local.conf      # YOUR personal settings</a:t>
+            </a:r>
+          </a:p>
+          <a:p>
+            <a:pPr>
+              <a:spcAft>
+                <a:spcPts val="0"/>
+              </a:spcAft>
+            </a:pPr>
+            <a:r>
+              <a:rPr sz="1600">
+                <a:solidFill>
+                  <a:srgbClr val="2D2D2D"/>
+                </a:solidFill>
+                <a:latin typeface="Consolas"/>
+              </a:rPr>
+              <a:t>  MACHINE = "qemux86-64"</a:t>
+            </a:r>
+          </a:p>
+          <a:p>
+            <a:pPr>
+              <a:spcAft>
+                <a:spcPts val="0"/>
+              </a:spcAft>
+            </a:pPr>
+            <a:r>
+              <a:rPr sz="1600">
+                <a:solidFill>
+                  <a:srgbClr val="2D2D2D"/>
+                </a:solidFill>
+                <a:latin typeface="Consolas"/>
+              </a:rPr>
+              <a:t>  DISTRO = "poky"</a:t>
+            </a:r>
+          </a:p>
+          <a:p>
+            <a:pPr>
+              <a:spcAft>
+                <a:spcPts val="0"/>
+              </a:spcAft>
+            </a:pPr>
+            <a:r>
+              <a:rPr sz="1600">
+                <a:solidFill>
+                  <a:srgbClr val="2D2D2D"/>
+                </a:solidFill>
+                <a:latin typeface="Consolas"/>
+              </a:rPr>
+              <a:t>  PACKAGE_CLASSES = "package_ipk"</a:t>
+            </a:r>
+          </a:p>
+          <a:p>
+            <a:pPr>
+              <a:spcAft>
+                <a:spcPts val="0"/>
+              </a:spcAft>
+            </a:pPr>
+            <a:r>
+              <a:rPr sz="1600">
+                <a:solidFill>
+                  <a:srgbClr val="2D2D2D"/>
+                </a:solidFill>
+                <a:latin typeface="Consolas"/>
+              </a:rPr>
+              <a:t>  DL_DIR = "${HOME}/yocto/downloads"</a:t>
+            </a:r>
+          </a:p>
+          <a:p>
+            <a:pPr>
+              <a:spcAft>
+                <a:spcPts val="0"/>
+              </a:spcAft>
+            </a:pPr>
+            <a:r>
+              <a:rPr sz="1600">
+                <a:solidFill>
+                  <a:srgbClr val="2D2D2D"/>
+                </a:solidFill>
+                <a:latin typeface="Consolas"/>
+              </a:rPr>
+              <a:t>  SSTATE_DIR = "${HOME}/yocto/sstate-cache"</a:t>
+            </a:r>
+          </a:p>
+          <a:p>
+            <a:pPr>
+              <a:spcAft>
+                <a:spcPts val="0"/>
+              </a:spcAft>
+            </a:pPr>
+            <a:r>
+              <a:rPr sz="1600">
+                <a:solidFill>
+                  <a:srgbClr val="2D2D2D"/>
+                </a:solidFill>
+                <a:latin typeface="Consolas"/>
+              </a:rPr>
+              <a:t>  BB_NUMBER_THREADS = "4"</a:t>
+            </a:r>
+          </a:p>
+          <a:p>
+            <a:pPr>
+              <a:spcAft>
+                <a:spcPts val="0"/>
+              </a:spcAft>
+            </a:pPr>
+            <a:r>
+              <a:rPr sz="1600">
+                <a:solidFill>
+                  <a:srgbClr val="2D2D2D"/>
+                </a:solidFill>
+                <a:latin typeface="Consolas"/>
+              </a:rPr>
+              <a:t>  EXTRA_IMAGE_FEATURES = "debug-tweaks ssh-server-openssh"</a:t>
+            </a:r>
+          </a:p>
+          <a:p>
+            <a:pPr>
+              <a:spcAft>
+                <a:spcPts val="0"/>
+              </a:spcAft>
+            </a:pPr>
+            <a:r>
+              <a:rPr sz="1600">
+                <a:solidFill>
+                  <a:srgbClr val="2D2D2D"/>
+                </a:solidFill>
+                <a:latin typeface="Consolas"/>
+              </a:rPr>
+              <a:t> </a:t>
+            </a:r>
+          </a:p>
+          <a:p>
+            <a:pPr>
+              <a:spcAft>
+                <a:spcPts val="0"/>
+              </a:spcAft>
+            </a:pPr>
+            <a:r>
+              <a:rPr sz="1600">
+                <a:solidFill>
+                  <a:srgbClr val="2D2D2D"/>
+                </a:solidFill>
+                <a:latin typeface="Consolas"/>
+              </a:rPr>
+              <a:t>build/conf/bblayers.conf   # Which layers are active</a:t>
+            </a:r>
+          </a:p>
+          <a:p>
+            <a:pPr>
+              <a:spcAft>
+                <a:spcPts val="0"/>
+              </a:spcAft>
+            </a:pPr>
+            <a:r>
+              <a:rPr sz="1600">
+                <a:solidFill>
+                  <a:srgbClr val="2D2D2D"/>
+                </a:solidFill>
+                <a:latin typeface="Consolas"/>
+              </a:rPr>
+              <a:t>  BBLAYERS = " \</a:t>
+            </a:r>
+          </a:p>
+          <a:p>
+            <a:pPr>
+              <a:spcAft>
+                <a:spcPts val="0"/>
+              </a:spcAft>
+            </a:pPr>
+            <a:r>
+              <a:rPr sz="1600">
+                <a:solidFill>
+                  <a:srgbClr val="2D2D2D"/>
+                </a:solidFill>
+                <a:latin typeface="Consolas"/>
+              </a:rPr>
+              <a:t>    ${TOPDIR}/../poky/meta \</a:t>
+            </a:r>
+          </a:p>
+          <a:p>
+            <a:pPr>
+              <a:spcAft>
+                <a:spcPts val="0"/>
+              </a:spcAft>
+            </a:pPr>
+            <a:r>
+              <a:rPr sz="1600">
+                <a:solidFill>
+                  <a:srgbClr val="2D2D2D"/>
+                </a:solidFill>
+                <a:latin typeface="Consolas"/>
+              </a:rPr>
+              <a:t>    ${TOPDIR}/../poky/meta-poky \</a:t>
+            </a:r>
+          </a:p>
+          <a:p>
+            <a:pPr>
+              <a:spcAft>
+                <a:spcPts val="0"/>
+              </a:spcAft>
+            </a:pPr>
+            <a:r>
+              <a:rPr sz="1600">
+                <a:solidFill>
+                  <a:srgbClr val="2D2D2D"/>
+                </a:solidFill>
+                <a:latin typeface="Consolas"/>
+              </a:rPr>
+              <a:t>    ${TOPDIR}/../meta-openembedded/meta-oe \</a:t>
+            </a:r>
+          </a:p>
+          <a:p>
+            <a:pPr>
+              <a:spcAft>
+                <a:spcPts val="0"/>
+              </a:spcAft>
+            </a:pPr>
+            <a:r>
+              <a:rPr sz="1600">
+                <a:solidFill>
+                  <a:srgbClr val="2D2D2D"/>
+                </a:solidFill>
+                <a:latin typeface="Consolas"/>
+              </a:rPr>
+              <a:t>    ${TOPDIR}/../meta-trainerdemo \</a:t>
+            </a:r>
+          </a:p>
+          <a:p>
+            <a:pPr>
+              <a:spcAft>
+                <a:spcPts val="0"/>
+              </a:spcAft>
+            </a:pPr>
+            <a:r>
+              <a:rPr sz="1600">
+                <a:solidFill>
+                  <a:srgbClr val="2D2D2D"/>
+                </a:solidFill>
+                <a:latin typeface="Consolas"/>
+              </a:rPr>
+              <a:t>  "</a:t>
+            </a:r>
+          </a:p>
+        </p:txBody>
+      </p:sp>
+    </p:spTree>
+  </p:cSld>
+  <p:clrMapOvr>
+    <a:masterClrMapping/>
+  </p:clrMapOvr>
+</p:sld>
+</file>
+
+<file path=ppt/slides/slide4.xml><?xml version="1.0" encoding="utf-8"?>
+<p:sld xmlns:a="http://schemas.openxmlformats.org/drawingml/2006/main" xmlns:r="http://schemas.openxmlformats.org/officeDocument/2006/relationships" xmlns:p="http://schemas.openxmlformats.org/presentationml/2006/main">
+  <p:cSld>
+    <p:spTree>
+      <p:nvGrpSpPr>
+        <p:cNvPr id="1" name=""/>
+        <p:cNvGrpSpPr/>
+        <p:nvPr/>
+      </p:nvGrpSpPr>
+      <p:grpSpPr>
+        <a:xfrm>
+          <a:off x="0" y="0"/>
+          <a:ext cx="0" cy="0"/>
+          <a:chOff x="0" y="0"/>
+          <a:chExt cx="0" cy="0"/>
+        </a:xfrm>
+      </p:grpSpPr>
+      <p:sp>
+        <p:nvSpPr>
+          <p:cNvPr id="2" name="Title 1"/>
+          <p:cNvSpPr>
+            <a:spLocks noGrp="1"/>
+          </p:cNvSpPr>
+          <p:nvPr>
+            <p:ph type="title"/>
+          </p:nvPr>
+        </p:nvSpPr>
+        <p:spPr/>
+        <p:txBody>
+          <a:bodyPr/>
+          <a:lstStyle/>
+          <a:p>
+            <a:r>
+              <a:rPr sz="3200" b="1" dirty="0">
+                <a:latin typeface="Calibri"/>
+              </a:rPr>
+              <a:t>Distro and Machine Configs</a:t>
+            </a:r>
+          </a:p>
+        </p:txBody>
+      </p:sp>
+      <p:sp>
+        <p:nvSpPr>
+          <p:cNvPr id="3" name="TextBox 2"/>
+          <p:cNvSpPr txBox="1"/>
+          <p:nvPr/>
+        </p:nvSpPr>
+        <p:spPr>
+          <a:xfrm>
+            <a:off x="822960" y="1417320"/>
+            <a:ext cx="10515600" cy="338554"/>
+          </a:xfrm>
+          <a:prstGeom prst="rect">
+            <a:avLst/>
+          </a:prstGeom>
+          <a:noFill/>
+        </p:spPr>
+        <p:txBody>
+          <a:bodyPr wrap="square" lIns="45720" rIns="45720" anchor="t">
+            <a:spAutoFit/>
+          </a:bodyPr>
+          <a:lstStyle/>
+          <a:p>
+            <a:pPr algn="l"/>
+            <a:r>
+              <a:rPr sz="1600" b="0" i="1" dirty="0">
                 <a:solidFill>
                   <a:srgbClr val="666666"/>
                 </a:solidFill>
@@ -5295,6 +6801,7 @@
           <a:lstStyle/>
           <a:p>
             <a:pPr algn="ctr"/>
+            <a:endParaRPr/>
           </a:p>
         </p:txBody>
       </p:sp>
@@ -5315,7 +6822,7 @@
           <a:noFill/>
         </p:spPr>
         <p:txBody>
-          <a:bodyPr wrap="square" anchor="t" lIns="45720" rIns="45720">
+          <a:bodyPr wrap="square" lIns="45720" rIns="45720" anchor="t">
             <a:spAutoFit/>
           </a:bodyPr>
           <a:lstStyle/>
@@ -5342,7 +6849,7 @@
         <p:spPr>
           <a:xfrm>
             <a:off x="960120" y="2468880"/>
-            <a:ext cx="4937760" cy="3794760"/>
+            <a:ext cx="4937760" cy="2467342"/>
           </a:xfrm>
           <a:prstGeom prst="rect">
             <a:avLst/>
@@ -5361,7 +6868,7 @@
               </a:spcAft>
             </a:pPr>
             <a:r>
-              <a:rPr sz="1300" b="1" i="0">
+              <a:rPr sz="2000" b="1" i="0" dirty="0">
                 <a:solidFill>
                   <a:srgbClr val="CC0066"/>
                 </a:solidFill>
@@ -5369,6 +6876,12 @@
               </a:rPr>
               <a:t>Location</a:t>
             </a:r>
+            <a:endParaRPr b="1" i="0" dirty="0">
+              <a:solidFill>
+                <a:srgbClr val="CC0066"/>
+              </a:solidFill>
+              <a:latin typeface="Calibri"/>
+            </a:endParaRPr>
           </a:p>
           <a:p>
             <a:pPr>
@@ -5377,14 +6890,47 @@
               </a:spcAft>
             </a:pPr>
             <a:r>
-              <a:rPr sz="1100" b="0" i="0">
+              <a:rPr sz="1600" b="0" i="0" dirty="0">
                 <a:solidFill>
                   <a:srgbClr val="333333"/>
                 </a:solidFill>
                 <a:latin typeface="Consolas"/>
               </a:rPr>
-              <a:t>meta-yourdistro/conf/distro/yourdistro.conf</a:t>
-            </a:r>
+              <a:t>meta-</a:t>
+            </a:r>
+            <a:r>
+              <a:rPr sz="1600" b="0" i="0" dirty="0" err="1">
+                <a:solidFill>
+                  <a:srgbClr val="333333"/>
+                </a:solidFill>
+                <a:latin typeface="Consolas"/>
+              </a:rPr>
+              <a:t>yourdistro</a:t>
+            </a:r>
+            <a:r>
+              <a:rPr sz="1600" b="0" i="0" dirty="0">
+                <a:solidFill>
+                  <a:srgbClr val="333333"/>
+                </a:solidFill>
+                <a:latin typeface="Consolas"/>
+              </a:rPr>
+              <a:t>/conf/distro/</a:t>
+            </a:r>
+            <a:r>
+              <a:rPr sz="1600" b="0" i="0" dirty="0" err="1">
+                <a:solidFill>
+                  <a:srgbClr val="333333"/>
+                </a:solidFill>
+                <a:latin typeface="Consolas"/>
+              </a:rPr>
+              <a:t>yourdistro.conf</a:t>
+            </a:r>
+            <a:endParaRPr sz="1600" b="0" i="0" dirty="0">
+              <a:solidFill>
+                <a:srgbClr val="333333"/>
+              </a:solidFill>
+              <a:latin typeface="Consolas"/>
+            </a:endParaRPr>
           </a:p>
           <a:p>
             <a:pPr>
@@ -5393,7 +6939,7 @@
               </a:spcAft>
             </a:pPr>
             <a:r>
-              <a:rPr sz="1300" b="1" i="0">
+              <a:rPr sz="2000" b="1" i="0" dirty="0">
                 <a:solidFill>
                   <a:srgbClr val="CC0066"/>
                 </a:solidFill>
@@ -5409,13 +6955,31 @@
               </a:spcAft>
             </a:pPr>
             <a:r>
-              <a:rPr sz="1000" b="0" i="0">
+              <a:rPr sz="1400" b="0" i="0" dirty="0">
                 <a:solidFill>
                   <a:srgbClr val="333333"/>
                 </a:solidFill>
                 <a:latin typeface="Consolas"/>
               </a:rPr>
-              <a:t>DISTRO_NAME = "YourDistro"</a:t>
+              <a:t>DISTRO_NAME = "</a:t>
+            </a:r>
+            <a:r>
+              <a:rPr sz="1400" b="0" i="0" dirty="0" err="1">
+                <a:solidFill>
+                  <a:srgbClr val="333333"/>
+                </a:solidFill>
+                <a:latin typeface="Consolas"/>
+              </a:rPr>
+              <a:t>YourDistro</a:t>
+            </a:r>
+            <a:r>
+              <a:rPr sz="1400" b="0" i="0" dirty="0">
+                <a:solidFill>
+                  <a:srgbClr val="333333"/>
+                </a:solidFill>
+                <a:latin typeface="Consolas"/>
+              </a:rPr>
+              <a:t>"</a:t>
             </a:r>
           </a:p>
           <a:p>
@@ -5425,7 +6989,7 @@
               </a:spcAft>
             </a:pPr>
             <a:r>
-              <a:rPr sz="1000" b="0" i="0">
+              <a:rPr sz="1400" b="0" i="0" dirty="0">
                 <a:solidFill>
                   <a:srgbClr val="333333"/>
                 </a:solidFill>
@@ -5441,13 +7005,49 @@
               </a:spcAft>
             </a:pPr>
             <a:r>
-              <a:rPr sz="1000" b="0" i="0">
+              <a:rPr sz="1400" b="0" i="0" dirty="0">
                 <a:solidFill>
                   <a:srgbClr val="333333"/>
                 </a:solidFill>
                 <a:latin typeface="Consolas"/>
               </a:rPr>
-              <a:t>DISTRO_FEATURES += "wifi bluetooth"</a:t>
+              <a:t>DISTRO_FEATURES += "</a:t>
+            </a:r>
+            <a:r>
+              <a:rPr sz="1400" b="0" i="0" dirty="0" err="1">
+                <a:solidFill>
+                  <a:srgbClr val="333333"/>
+                </a:solidFill>
+                <a:latin typeface="Consolas"/>
+              </a:rPr>
+              <a:t>wifi</a:t>
+            </a:r>
+            <a:r>
+              <a:rPr sz="1400" b="0" i="0" dirty="0">
+                <a:solidFill>
+                  <a:srgbClr val="333333"/>
+                </a:solidFill>
+                <a:latin typeface="Consolas"/>
+              </a:rPr>
+              <a:t> </a:t>
+            </a:r>
+            <a:r>
+              <a:rPr sz="1400" b="0" i="0" dirty="0" err="1">
+                <a:solidFill>
+                  <a:srgbClr val="333333"/>
+                </a:solidFill>
+                <a:latin typeface="Consolas"/>
+              </a:rPr>
+              <a:t>bluetooth</a:t>
+            </a:r>
+            <a:r>
+              <a:rPr sz="1400" b="0" i="0" dirty="0">
+                <a:solidFill>
+                  <a:srgbClr val="333333"/>
+                </a:solidFill>
+                <a:latin typeface="Consolas"/>
+              </a:rPr>
+              <a:t>"</a:t>
             </a:r>
           </a:p>
           <a:p>
@@ -5457,13 +7057,31 @@
               </a:spcAft>
             </a:pPr>
             <a:r>
-              <a:rPr sz="1000" b="0" i="0">
+              <a:rPr sz="1400" b="0" i="0" dirty="0">
                 <a:solidFill>
                   <a:srgbClr val="333333"/>
                 </a:solidFill>
                 <a:latin typeface="Consolas"/>
               </a:rPr>
-              <a:t>INIT_MANAGER = "systemd"</a:t>
+              <a:t>INIT_MANAGER = "</a:t>
+            </a:r>
+            <a:r>
+              <a:rPr sz="1400" b="0" i="0" dirty="0" err="1">
+                <a:solidFill>
+                  <a:srgbClr val="333333"/>
+                </a:solidFill>
+                <a:latin typeface="Consolas"/>
+              </a:rPr>
+              <a:t>systemd</a:t>
+            </a:r>
+            <a:r>
+              <a:rPr sz="1400" b="0" i="0" dirty="0">
+                <a:solidFill>
+                  <a:srgbClr val="333333"/>
+                </a:solidFill>
+                <a:latin typeface="Consolas"/>
+              </a:rPr>
+              <a:t>"</a:t>
             </a:r>
           </a:p>
           <a:p>
@@ -5473,7 +7091,7 @@
               </a:spcAft>
             </a:pPr>
             <a:r>
-              <a:rPr sz="1000" b="0" i="0">
+              <a:rPr sz="1400" b="0" i="0" dirty="0">
                 <a:solidFill>
                   <a:srgbClr val="333333"/>
                 </a:solidFill>
@@ -5527,6 +7145,7 @@
           <a:lstStyle/>
           <a:p>
             <a:pPr algn="ctr"/>
+            <a:endParaRPr/>
           </a:p>
         </p:txBody>
       </p:sp>
@@ -5547,7 +7166,7 @@
           <a:noFill/>
         </p:spPr>
         <p:txBody>
-          <a:bodyPr wrap="square" anchor="t" lIns="45720" rIns="45720">
+          <a:bodyPr wrap="square" lIns="45720" rIns="45720" anchor="t">
             <a:spAutoFit/>
           </a:bodyPr>
           <a:lstStyle/>
@@ -5573,8 +7192,8 @@
         </p:nvSpPr>
         <p:spPr>
           <a:xfrm>
-            <a:off x="6400800" y="2468880"/>
-            <a:ext cx="4937760" cy="3794760"/>
+            <a:off x="6446520" y="2468880"/>
+            <a:ext cx="4937760" cy="2467342"/>
           </a:xfrm>
           <a:prstGeom prst="rect">
             <a:avLst/>
@@ -5593,7 +7212,7 @@
               </a:spcAft>
             </a:pPr>
             <a:r>
-              <a:rPr sz="1300" b="1" i="0">
+              <a:rPr sz="2000" b="1" i="0" dirty="0">
                 <a:solidFill>
                   <a:srgbClr val="663399"/>
                 </a:solidFill>
@@ -5609,14 +7228,47 @@
               </a:spcAft>
             </a:pPr>
             <a:r>
-              <a:rPr sz="1100" b="0" i="0">
+              <a:rPr sz="1600" b="0" i="0" dirty="0">
                 <a:solidFill>
                   <a:srgbClr val="333333"/>
                 </a:solidFill>
                 <a:latin typeface="Consolas"/>
               </a:rPr>
-              <a:t>meta-yourbsp/conf/machine/yourboard.conf</a:t>
-            </a:r>
+              <a:t>meta-</a:t>
+            </a:r>
+            <a:r>
+              <a:rPr sz="1600" b="0" i="0" dirty="0" err="1">
+                <a:solidFill>
+                  <a:srgbClr val="333333"/>
+                </a:solidFill>
+                <a:latin typeface="Consolas"/>
+              </a:rPr>
+              <a:t>yourbsp</a:t>
+            </a:r>
+            <a:r>
+              <a:rPr sz="1600" b="0" i="0" dirty="0">
+                <a:solidFill>
+                  <a:srgbClr val="333333"/>
+                </a:solidFill>
+                <a:latin typeface="Consolas"/>
+              </a:rPr>
+              <a:t>/conf/machine/</a:t>
+            </a:r>
+            <a:r>
+              <a:rPr sz="1600" b="0" i="0" dirty="0" err="1">
+                <a:solidFill>
+                  <a:srgbClr val="333333"/>
+                </a:solidFill>
+                <a:latin typeface="Consolas"/>
+              </a:rPr>
+              <a:t>yourboard.conf</a:t>
+            </a:r>
+            <a:endParaRPr sz="1600" b="0" i="0" dirty="0">
+              <a:solidFill>
+                <a:srgbClr val="333333"/>
+              </a:solidFill>
+              <a:latin typeface="Consolas"/>
+            </a:endParaRPr>
           </a:p>
           <a:p>
             <a:pPr>
@@ -5625,7 +7277,7 @@
               </a:spcAft>
             </a:pPr>
             <a:r>
-              <a:rPr sz="1300" b="1" i="0">
+              <a:rPr sz="2000" b="1" i="0" dirty="0">
                 <a:solidFill>
                   <a:srgbClr val="663399"/>
                 </a:solidFill>
@@ -5641,7 +7293,7 @@
               </a:spcAft>
             </a:pPr>
             <a:r>
-              <a:rPr sz="1000" b="0" i="0">
+              <a:rPr sz="1400" b="0" i="0" dirty="0">
                 <a:solidFill>
                   <a:srgbClr val="333333"/>
                 </a:solidFill>
@@ -5657,13 +7309,40 @@
               </a:spcAft>
             </a:pPr>
             <a:r>
-              <a:rPr sz="1000" b="0" i="0">
+              <a:rPr sz="1400" b="0" i="0" dirty="0" err="1">
                 <a:solidFill>
                   <a:srgbClr val="333333"/>
                 </a:solidFill>
                 <a:latin typeface="Consolas"/>
               </a:rPr>
-              <a:t>PREFERRED_PROVIDER_virtual/kernel = "linux-yocto"</a:t>
+              <a:t>PREFERRED_PROVIDER_virtual</a:t>
+            </a:r>
+            <a:r>
+              <a:rPr sz="1400" b="0" i="0" dirty="0">
+                <a:solidFill>
+                  <a:srgbClr val="333333"/>
+                </a:solidFill>
+                <a:latin typeface="Consolas"/>
+              </a:rPr>
+              <a:t>/kernel = "</a:t>
+            </a:r>
+            <a:r>
+              <a:rPr sz="1400" b="0" i="0" dirty="0" err="1">
+                <a:solidFill>
+                  <a:srgbClr val="333333"/>
+                </a:solidFill>
+                <a:latin typeface="Consolas"/>
+              </a:rPr>
+              <a:t>linux-yocto</a:t>
+            </a:r>
+            <a:r>
+              <a:rPr sz="1400" b="0" i="0" dirty="0">
+                <a:solidFill>
+                  <a:srgbClr val="333333"/>
+                </a:solidFill>
+                <a:latin typeface="Consolas"/>
+              </a:rPr>
+              <a:t>"</a:t>
             </a:r>
           </a:p>
           <a:p>
@@ -5673,13 +7352,31 @@
               </a:spcAft>
             </a:pPr>
             <a:r>
-              <a:rPr sz="1000" b="0" i="0">
+              <a:rPr sz="1400" b="0" i="0" dirty="0">
                 <a:solidFill>
                   <a:srgbClr val="333333"/>
                 </a:solidFill>
                 <a:latin typeface="Consolas"/>
               </a:rPr>
-              <a:t>KERNEL_DEVICETREE = "vendor/yourboard.dtb"</a:t>
+              <a:t>KERNEL_DEVICETREE = "vendor/</a:t>
+            </a:r>
+            <a:r>
+              <a:rPr sz="1400" b="0" i="0" dirty="0" err="1">
+                <a:solidFill>
+                  <a:srgbClr val="333333"/>
+                </a:solidFill>
+                <a:latin typeface="Consolas"/>
+              </a:rPr>
+              <a:t>yourboard.dtb</a:t>
+            </a:r>
+            <a:r>
+              <a:rPr sz="1400" b="0" i="0" dirty="0">
+                <a:solidFill>
+                  <a:srgbClr val="333333"/>
+                </a:solidFill>
+                <a:latin typeface="Consolas"/>
+              </a:rPr>
+              <a:t>"</a:t>
             </a:r>
           </a:p>
           <a:p>
@@ -5689,13 +7386,49 @@
               </a:spcAft>
             </a:pPr>
             <a:r>
-              <a:rPr sz="1000" b="0" i="0">
+              <a:rPr sz="1400" b="0" i="0" dirty="0">
                 <a:solidFill>
                   <a:srgbClr val="333333"/>
                 </a:solidFill>
                 <a:latin typeface="Consolas"/>
               </a:rPr>
-              <a:t>MACHINE_FEATURES += "usbhost wifi"</a:t>
+              <a:t>MACHINE_FEATURES += "</a:t>
+            </a:r>
+            <a:r>
+              <a:rPr sz="1400" b="0" i="0" dirty="0" err="1">
+                <a:solidFill>
+                  <a:srgbClr val="333333"/>
+                </a:solidFill>
+                <a:latin typeface="Consolas"/>
+              </a:rPr>
+              <a:t>usbhost</a:t>
+            </a:r>
+            <a:r>
+              <a:rPr sz="1400" b="0" i="0" dirty="0">
+                <a:solidFill>
+                  <a:srgbClr val="333333"/>
+                </a:solidFill>
+                <a:latin typeface="Consolas"/>
+              </a:rPr>
+              <a:t> </a:t>
+            </a:r>
+            <a:r>
+              <a:rPr sz="1400" b="0" i="0" dirty="0" err="1">
+                <a:solidFill>
+                  <a:srgbClr val="333333"/>
+                </a:solidFill>
+                <a:latin typeface="Consolas"/>
+              </a:rPr>
+              <a:t>wifi</a:t>
+            </a:r>
+            <a:r>
+              <a:rPr sz="1400" b="0" i="0" dirty="0">
+                <a:solidFill>
+                  <a:srgbClr val="333333"/>
+                </a:solidFill>
+                <a:latin typeface="Consolas"/>
+              </a:rPr>
+              <a:t>"</a:t>
             </a:r>
           </a:p>
           <a:p>
@@ -5705,7 +7438,7 @@
               </a:spcAft>
             </a:pPr>
             <a:r>
-              <a:rPr sz="1000" b="0" i="0">
+              <a:rPr sz="1400" b="0" i="0" dirty="0">
                 <a:solidFill>
                   <a:srgbClr val="333333"/>
                 </a:solidFill>
@@ -5724,8 +7457,8 @@
 </p:sld>
 </file>
 
-<file path=ppt/slides/slide11.xml><?xml version="1.0" encoding="utf-8"?>
-<p:sld xmlns:a="http://schemas.openxmlformats.org/drawingml/2006/main" xmlns:p="http://schemas.openxmlformats.org/presentationml/2006/main" xmlns:r="http://schemas.openxmlformats.org/officeDocument/2006/relationships">
+<file path=ppt/slides/slide5.xml><?xml version="1.0" encoding="utf-8"?>
+<p:sld xmlns:a="http://schemas.openxmlformats.org/drawingml/2006/main" xmlns:r="http://schemas.openxmlformats.org/officeDocument/2006/relationships" xmlns:p="http://schemas.openxmlformats.org/presentationml/2006/main">
   <p:cSld>
     <p:spTree>
       <p:nvGrpSpPr>
@@ -5733,7 +7466,14 @@
         <p:cNvGrpSpPr/>
         <p:nvPr/>
       </p:nvGrpSpPr>
-      <p:grpSpPr/>
+      <p:grpSpPr>
+        <a:xfrm>
+          <a:off x="0" y="0"/>
+          <a:ext cx="0" cy="0"/>
+          <a:chOff x="0" y="0"/>
+          <a:chExt cx="0" cy="0"/>
+        </a:xfrm>
+      </p:grpSpPr>
       <p:sp>
         <p:nvSpPr>
           <p:cNvPr id="2" name="Title 1"/>
@@ -5750,10 +7490,7 @@
           <a:lstStyle/>
           <a:p>
             <a:r>
-              <a:rPr sz="3200" b="1">
-                <a:solidFill>
-                  <a:srgbClr val="CC0066"/>
-                </a:solidFill>
+              <a:rPr sz="3200" b="1" dirty="0">
                 <a:latin typeface="Calibri"/>
               </a:rPr>
               <a:t>Anatomy of a Recipe</a:t>
@@ -5778,7 +7515,7 @@
           <a:noFill/>
         </p:spPr>
         <p:txBody>
-          <a:bodyPr wrap="square" anchor="t" lIns="45720" rIns="45720">
+          <a:bodyPr wrap="square" lIns="45720" rIns="45720" anchor="t">
             <a:spAutoFit/>
           </a:bodyPr>
           <a:lstStyle/>
@@ -5839,6 +7576,7 @@
           <a:lstStyle/>
           <a:p>
             <a:pPr algn="ctr"/>
+            <a:endParaRPr/>
           </a:p>
         </p:txBody>
       </p:sp>
@@ -5883,6 +7621,7 @@
           <a:lstStyle/>
           <a:p>
             <a:pPr algn="ctr"/>
+            <a:endParaRPr/>
           </a:p>
         </p:txBody>
       </p:sp>
@@ -5894,8 +7633,8 @@
         </p:nvSpPr>
         <p:spPr>
           <a:xfrm>
-            <a:off x="1005840" y="1874519"/>
-            <a:ext cx="10241280" cy="4389120"/>
+            <a:off x="1127760" y="1783080"/>
+            <a:ext cx="10241280" cy="4616648"/>
           </a:xfrm>
           <a:prstGeom prst="rect">
             <a:avLst/>
@@ -5914,7 +7653,7 @@
               </a:spcAft>
             </a:pPr>
             <a:r>
-              <a:rPr sz="1100" i="1">
+              <a:rPr sz="1400" i="1">
                 <a:solidFill>
                   <a:srgbClr val="808080"/>
                 </a:solidFill>
@@ -5930,7 +7669,7 @@
               </a:spcAft>
             </a:pPr>
             <a:r>
-              <a:rPr sz="1100">
+              <a:rPr sz="1400">
                 <a:solidFill>
                   <a:srgbClr val="2D2D2D"/>
                 </a:solidFill>
@@ -5946,7 +7685,7 @@
               </a:spcAft>
             </a:pPr>
             <a:r>
-              <a:rPr sz="1100">
+              <a:rPr sz="1400">
                 <a:solidFill>
                   <a:srgbClr val="2D2D2D"/>
                 </a:solidFill>
@@ -5962,7 +7701,7 @@
               </a:spcAft>
             </a:pPr>
             <a:r>
-              <a:rPr sz="1100">
+              <a:rPr sz="1400">
                 <a:solidFill>
                   <a:srgbClr val="2D2D2D"/>
                 </a:solidFill>
@@ -5978,7 +7717,7 @@
               </a:spcAft>
             </a:pPr>
             <a:r>
-              <a:rPr sz="1100">
+              <a:rPr sz="1400">
                 <a:solidFill>
                   <a:srgbClr val="2D2D2D"/>
                 </a:solidFill>
@@ -5994,7 +7733,7 @@
               </a:spcAft>
             </a:pPr>
             <a:r>
-              <a:rPr sz="1100">
+              <a:rPr sz="1400">
                 <a:solidFill>
                   <a:srgbClr val="2D2D2D"/>
                 </a:solidFill>
@@ -6010,7 +7749,7 @@
               </a:spcAft>
             </a:pPr>
             <a:r>
-              <a:rPr sz="1100">
+              <a:rPr sz="1400">
                 <a:solidFill>
                   <a:srgbClr val="2D2D2D"/>
                 </a:solidFill>
@@ -6026,7 +7765,7 @@
               </a:spcAft>
             </a:pPr>
             <a:r>
-              <a:rPr sz="1100" i="1">
+              <a:rPr sz="1400" i="1">
                 <a:solidFill>
                   <a:srgbClr val="808080"/>
                 </a:solidFill>
@@ -6042,7 +7781,7 @@
               </a:spcAft>
             </a:pPr>
             <a:r>
-              <a:rPr sz="1100">
+              <a:rPr sz="1400">
                 <a:solidFill>
                   <a:srgbClr val="2D2D2D"/>
                 </a:solidFill>
@@ -6058,7 +7797,7 @@
               </a:spcAft>
             </a:pPr>
             <a:r>
-              <a:rPr sz="1100">
+              <a:rPr sz="1400">
                 <a:solidFill>
                   <a:srgbClr val="2D2D2D"/>
                 </a:solidFill>
@@ -6074,7 +7813,7 @@
               </a:spcAft>
             </a:pPr>
             <a:r>
-              <a:rPr sz="1100">
+              <a:rPr sz="1400">
                 <a:solidFill>
                   <a:srgbClr val="2D2D2D"/>
                 </a:solidFill>
@@ -6090,7 +7829,7 @@
               </a:spcAft>
             </a:pPr>
             <a:r>
-              <a:rPr sz="1100">
+              <a:rPr sz="1400">
                 <a:solidFill>
                   <a:srgbClr val="2D2D2D"/>
                 </a:solidFill>
@@ -6106,7 +7845,7 @@
               </a:spcAft>
             </a:pPr>
             <a:r>
-              <a:rPr sz="1100" i="1">
+              <a:rPr sz="1400" i="1">
                 <a:solidFill>
                   <a:srgbClr val="808080"/>
                 </a:solidFill>
@@ -6122,7 +7861,7 @@
               </a:spcAft>
             </a:pPr>
             <a:r>
-              <a:rPr sz="1100">
+              <a:rPr sz="1400">
                 <a:solidFill>
                   <a:srgbClr val="2D2D2D"/>
                 </a:solidFill>
@@ -6138,7 +7877,7 @@
               </a:spcAft>
             </a:pPr>
             <a:r>
-              <a:rPr sz="1100">
+              <a:rPr sz="1400">
                 <a:solidFill>
                   <a:srgbClr val="2D2D2D"/>
                 </a:solidFill>
@@ -6154,7 +7893,7 @@
               </a:spcAft>
             </a:pPr>
             <a:r>
-              <a:rPr sz="1100" i="1">
+              <a:rPr sz="1400" i="1">
                 <a:solidFill>
                   <a:srgbClr val="808080"/>
                 </a:solidFill>
@@ -6170,7 +7909,7 @@
               </a:spcAft>
             </a:pPr>
             <a:r>
-              <a:rPr sz="1100">
+              <a:rPr sz="1400">
                 <a:solidFill>
                   <a:srgbClr val="2D2D2D"/>
                 </a:solidFill>
@@ -6186,7 +7925,7 @@
               </a:spcAft>
             </a:pPr>
             <a:r>
-              <a:rPr sz="1100">
+              <a:rPr sz="1400">
                 <a:solidFill>
                   <a:srgbClr val="2D2D2D"/>
                 </a:solidFill>
@@ -6202,7 +7941,7 @@
               </a:spcAft>
             </a:pPr>
             <a:r>
-              <a:rPr sz="1100" i="1">
+              <a:rPr sz="1400" i="1">
                 <a:solidFill>
                   <a:srgbClr val="808080"/>
                 </a:solidFill>
@@ -6218,7 +7957,7 @@
               </a:spcAft>
             </a:pPr>
             <a:r>
-              <a:rPr sz="1100">
+              <a:rPr sz="1400">
                 <a:solidFill>
                   <a:srgbClr val="2D2D2D"/>
                 </a:solidFill>
@@ -6234,7 +7973,7 @@
               </a:spcAft>
             </a:pPr>
             <a:r>
-              <a:rPr sz="1100">
+              <a:rPr sz="1400">
                 <a:solidFill>
                   <a:srgbClr val="2D2D2D"/>
                 </a:solidFill>
@@ -6253,8 +7992,8 @@
 </p:sld>
 </file>
 
-<file path=ppt/slides/slide12.xml><?xml version="1.0" encoding="utf-8"?>
-<p:sld xmlns:a="http://schemas.openxmlformats.org/drawingml/2006/main" xmlns:p="http://schemas.openxmlformats.org/presentationml/2006/main" xmlns:r="http://schemas.openxmlformats.org/officeDocument/2006/relationships">
+<file path=ppt/slides/slide6.xml><?xml version="1.0" encoding="utf-8"?>
+<p:sld xmlns:a="http://schemas.openxmlformats.org/drawingml/2006/main" xmlns:r="http://schemas.openxmlformats.org/officeDocument/2006/relationships" xmlns:p="http://schemas.openxmlformats.org/presentationml/2006/main">
   <p:cSld>
     <p:spTree>
       <p:nvGrpSpPr>
@@ -6262,7 +8001,14 @@
         <p:cNvGrpSpPr/>
         <p:nvPr/>
       </p:nvGrpSpPr>
-      <p:grpSpPr/>
+      <p:grpSpPr>
+        <a:xfrm>
+          <a:off x="0" y="0"/>
+          <a:ext cx="0" cy="0"/>
+          <a:chOff x="0" y="0"/>
+          <a:chExt cx="0" cy="0"/>
+        </a:xfrm>
+      </p:grpSpPr>
       <p:sp>
         <p:nvSpPr>
           <p:cNvPr id="2" name="Title 1"/>
@@ -6279,13 +8025,22 @@
           <a:lstStyle/>
           <a:p>
             <a:r>
-              <a:rPr sz="3200" b="1">
-                <a:solidFill>
-                  <a:srgbClr val="CC0066"/>
-                </a:solidFill>
+              <a:rPr sz="3200" b="1" dirty="0">
                 <a:latin typeface="Calibri"/>
               </a:rPr>
-              <a:t>SRC_URI — Fetching Source</a:t>
+              <a:t>SRC_URI</a:t>
+            </a:r>
+            <a:r>
+              <a:rPr lang="en-IN" sz="3200" b="1" dirty="0">
+                <a:latin typeface="Calibri"/>
+              </a:rPr>
+              <a:t>:</a:t>
+            </a:r>
+            <a:r>
+              <a:rPr sz="3200" b="1" dirty="0">
+                <a:latin typeface="Calibri"/>
+              </a:rPr>
+              <a:t> Fetching Source</a:t>
             </a:r>
           </a:p>
         </p:txBody>
@@ -6307,7 +8062,7 @@
           <a:noFill/>
         </p:spPr>
         <p:txBody>
-          <a:bodyPr wrap="square" anchor="t" lIns="45720" rIns="45720">
+          <a:bodyPr wrap="square" lIns="45720" rIns="45720" anchor="t">
             <a:spAutoFit/>
           </a:bodyPr>
           <a:lstStyle/>
@@ -6368,6 +8123,7 @@
           <a:lstStyle/>
           <a:p>
             <a:pPr algn="ctr"/>
+            <a:endParaRPr/>
           </a:p>
         </p:txBody>
       </p:sp>
@@ -6412,6 +8168,7 @@
           <a:lstStyle/>
           <a:p>
             <a:pPr algn="ctr"/>
+            <a:endParaRPr/>
           </a:p>
         </p:txBody>
       </p:sp>
@@ -6424,7 +8181,7 @@
         <p:spPr>
           <a:xfrm>
             <a:off x="1005840" y="1874519"/>
-            <a:ext cx="10241280" cy="4389120"/>
+            <a:ext cx="10241280" cy="3970318"/>
           </a:xfrm>
           <a:prstGeom prst="rect">
             <a:avLst/>
@@ -6443,7 +8200,7 @@
               </a:spcAft>
             </a:pPr>
             <a:r>
-              <a:rPr sz="1100" i="1">
+              <a:rPr sz="1400" i="1">
                 <a:solidFill>
                   <a:srgbClr val="808080"/>
                 </a:solidFill>
@@ -6459,7 +8216,7 @@
               </a:spcAft>
             </a:pPr>
             <a:r>
-              <a:rPr sz="1100">
+              <a:rPr sz="1400">
                 <a:solidFill>
                   <a:srgbClr val="2D2D2D"/>
                 </a:solidFill>
@@ -6475,7 +8232,7 @@
               </a:spcAft>
             </a:pPr>
             <a:r>
-              <a:rPr sz="1100">
+              <a:rPr sz="1400">
                 <a:solidFill>
                   <a:srgbClr val="2D2D2D"/>
                 </a:solidFill>
@@ -6491,7 +8248,7 @@
               </a:spcAft>
             </a:pPr>
             <a:r>
-              <a:rPr sz="1100" i="1">
+              <a:rPr sz="1400" i="1">
                 <a:solidFill>
                   <a:srgbClr val="808080"/>
                 </a:solidFill>
@@ -6507,7 +8264,7 @@
               </a:spcAft>
             </a:pPr>
             <a:r>
-              <a:rPr sz="1100">
+              <a:rPr sz="1400">
                 <a:solidFill>
                   <a:srgbClr val="2D2D2D"/>
                 </a:solidFill>
@@ -6523,7 +8280,7 @@
               </a:spcAft>
             </a:pPr>
             <a:r>
-              <a:rPr sz="1100">
+              <a:rPr sz="1400">
                 <a:solidFill>
                   <a:srgbClr val="2D2D2D"/>
                 </a:solidFill>
@@ -6539,7 +8296,7 @@
               </a:spcAft>
             </a:pPr>
             <a:r>
-              <a:rPr sz="1100">
+              <a:rPr sz="1400">
                 <a:solidFill>
                   <a:srgbClr val="2D2D2D"/>
                 </a:solidFill>
@@ -6555,7 +8312,7 @@
               </a:spcAft>
             </a:pPr>
             <a:r>
-              <a:rPr sz="1100">
+              <a:rPr sz="1400">
                 <a:solidFill>
                   <a:srgbClr val="2D2D2D"/>
                 </a:solidFill>
@@ -6571,7 +8328,7 @@
               </a:spcAft>
             </a:pPr>
             <a:r>
-              <a:rPr sz="1100" i="1">
+              <a:rPr sz="1400" i="1">
                 <a:solidFill>
                   <a:srgbClr val="808080"/>
                 </a:solidFill>
@@ -6587,7 +8344,7 @@
               </a:spcAft>
             </a:pPr>
             <a:r>
-              <a:rPr sz="1100">
+              <a:rPr sz="1400">
                 <a:solidFill>
                   <a:srgbClr val="2D2D2D"/>
                 </a:solidFill>
@@ -6603,7 +8360,7 @@
               </a:spcAft>
             </a:pPr>
             <a:r>
-              <a:rPr sz="1100">
+              <a:rPr sz="1400">
                 <a:solidFill>
                   <a:srgbClr val="2D2D2D"/>
                 </a:solidFill>
@@ -6619,7 +8376,7 @@
               </a:spcAft>
             </a:pPr>
             <a:r>
-              <a:rPr sz="1100" i="1">
+              <a:rPr sz="1400" i="1">
                 <a:solidFill>
                   <a:srgbClr val="808080"/>
                 </a:solidFill>
@@ -6635,7 +8392,7 @@
               </a:spcAft>
             </a:pPr>
             <a:r>
-              <a:rPr sz="1100">
+              <a:rPr sz="1400">
                 <a:solidFill>
                   <a:srgbClr val="2D2D2D"/>
                 </a:solidFill>
@@ -6651,7 +8408,7 @@
               </a:spcAft>
             </a:pPr>
             <a:r>
-              <a:rPr sz="1100">
+              <a:rPr sz="1400">
                 <a:solidFill>
                   <a:srgbClr val="2D2D2D"/>
                 </a:solidFill>
@@ -6667,7 +8424,7 @@
               </a:spcAft>
             </a:pPr>
             <a:r>
-              <a:rPr sz="1100">
+              <a:rPr sz="1400">
                 <a:solidFill>
                   <a:srgbClr val="2D2D2D"/>
                 </a:solidFill>
@@ -6683,7 +8440,7 @@
               </a:spcAft>
             </a:pPr>
             <a:r>
-              <a:rPr sz="1100">
+              <a:rPr sz="1400">
                 <a:solidFill>
                   <a:srgbClr val="2D2D2D"/>
                 </a:solidFill>
@@ -6699,7 +8456,7 @@
               </a:spcAft>
             </a:pPr>
             <a:r>
-              <a:rPr sz="1100" i="1">
+              <a:rPr sz="1400" i="1">
                 <a:solidFill>
                   <a:srgbClr val="808080"/>
                 </a:solidFill>
@@ -6715,7 +8472,7 @@
               </a:spcAft>
             </a:pPr>
             <a:r>
-              <a:rPr sz="1100">
+              <a:rPr sz="1400">
                 <a:solidFill>
                   <a:srgbClr val="2D2D2D"/>
                 </a:solidFill>
@@ -6734,8 +8491,8 @@
 </p:sld>
 </file>
 
-<file path=ppt/slides/slide13.xml><?xml version="1.0" encoding="utf-8"?>
-<p:sld xmlns:a="http://schemas.openxmlformats.org/drawingml/2006/main" xmlns:p="http://schemas.openxmlformats.org/presentationml/2006/main" xmlns:r="http://schemas.openxmlformats.org/officeDocument/2006/relationships">
+<file path=ppt/slides/slide7.xml><?xml version="1.0" encoding="utf-8"?>
+<p:sld xmlns:a="http://schemas.openxmlformats.org/drawingml/2006/main" xmlns:r="http://schemas.openxmlformats.org/officeDocument/2006/relationships" xmlns:p="http://schemas.openxmlformats.org/presentationml/2006/main">
   <p:cSld>
     <p:spTree>
       <p:nvGrpSpPr>
@@ -6743,7 +8500,14 @@
         <p:cNvGrpSpPr/>
         <p:nvPr/>
       </p:nvGrpSpPr>
-      <p:grpSpPr/>
+      <p:grpSpPr>
+        <a:xfrm>
+          <a:off x="0" y="0"/>
+          <a:ext cx="0" cy="0"/>
+          <a:chOff x="0" y="0"/>
+          <a:chExt cx="0" cy="0"/>
+        </a:xfrm>
+      </p:grpSpPr>
       <p:sp>
         <p:nvSpPr>
           <p:cNvPr id="2" name="Title 1"/>
@@ -6760,10 +8524,7 @@
           <a:lstStyle/>
           <a:p>
             <a:r>
-              <a:rPr sz="3200" b="1">
-                <a:solidFill>
-                  <a:srgbClr val="CC0066"/>
-                </a:solidFill>
+              <a:rPr sz="3200" b="1" dirty="0">
                 <a:latin typeface="Calibri"/>
               </a:rPr>
               <a:t>Patches and Checksums</a:t>
@@ -6788,7 +8549,7 @@
           <a:noFill/>
         </p:spPr>
         <p:txBody>
-          <a:bodyPr wrap="square" anchor="t" lIns="45720" rIns="45720">
+          <a:bodyPr wrap="square" lIns="45720" rIns="45720" anchor="t">
             <a:spAutoFit/>
           </a:bodyPr>
           <a:lstStyle/>
@@ -6815,7 +8576,7 @@
         <p:spPr>
           <a:xfrm>
             <a:off x="822960" y="1783080"/>
-            <a:ext cx="10515600" cy="4480560"/>
+            <a:ext cx="10515600" cy="3354765"/>
           </a:xfrm>
           <a:prstGeom prst="rect">
             <a:avLst/>
@@ -6834,7 +8595,7 @@
               </a:spcAft>
             </a:pPr>
             <a:r>
-              <a:rPr sz="1600" b="1" i="0">
+              <a:rPr sz="2000" b="1" i="0">
                 <a:solidFill>
                   <a:srgbClr val="CC0066"/>
                 </a:solidFill>
@@ -6850,7 +8611,7 @@
               </a:spcAft>
             </a:pPr>
             <a:r>
-              <a:rPr sz="1300" b="0" i="0">
+              <a:rPr sz="1600" b="0" i="0">
                 <a:solidFill>
                   <a:srgbClr val="333333"/>
                 </a:solidFill>
@@ -6866,7 +8627,7 @@
               </a:spcAft>
             </a:pPr>
             <a:r>
-              <a:rPr sz="1300" b="0" i="0">
+              <a:rPr sz="1600" b="0" i="0">
                 <a:solidFill>
                   <a:srgbClr val="333333"/>
                 </a:solidFill>
@@ -6882,7 +8643,7 @@
               </a:spcAft>
             </a:pPr>
             <a:r>
-              <a:rPr sz="1300" b="0" i="0">
+              <a:rPr sz="1600" b="0" i="0">
                 <a:solidFill>
                   <a:srgbClr val="333333"/>
                 </a:solidFill>
@@ -6898,7 +8659,7 @@
               </a:spcAft>
             </a:pPr>
             <a:r>
-              <a:rPr sz="1600" b="1" i="0">
+              <a:rPr sz="2000" b="1" i="0">
                 <a:solidFill>
                   <a:srgbClr val="CC0066"/>
                 </a:solidFill>
@@ -6914,7 +8675,7 @@
               </a:spcAft>
             </a:pPr>
             <a:r>
-              <a:rPr sz="1300" b="0" i="0">
+              <a:rPr sz="1600" b="0" i="0">
                 <a:solidFill>
                   <a:srgbClr val="333333"/>
                 </a:solidFill>
@@ -6930,7 +8691,7 @@
               </a:spcAft>
             </a:pPr>
             <a:r>
-              <a:rPr sz="1300" b="0" i="0">
+              <a:rPr sz="1600" b="0" i="0">
                 <a:solidFill>
                   <a:srgbClr val="333333"/>
                 </a:solidFill>
@@ -6946,7 +8707,7 @@
               </a:spcAft>
             </a:pPr>
             <a:r>
-              <a:rPr sz="1300" b="0" i="0">
+              <a:rPr sz="1600" b="0" i="0">
                 <a:solidFill>
                   <a:srgbClr val="333333"/>
                 </a:solidFill>
@@ -6962,7 +8723,7 @@
               </a:spcAft>
             </a:pPr>
             <a:r>
-              <a:rPr sz="1600" b="1" i="0">
+              <a:rPr sz="2000" b="1" i="0">
                 <a:solidFill>
                   <a:srgbClr val="663399"/>
                 </a:solidFill>
@@ -6978,7 +8739,7 @@
               </a:spcAft>
             </a:pPr>
             <a:r>
-              <a:rPr sz="1300" b="0" i="0">
+              <a:rPr sz="1600" b="0" i="0">
                 <a:solidFill>
                   <a:srgbClr val="333333"/>
                 </a:solidFill>
@@ -6997,8 +8758,8 @@
 </p:sld>
 </file>
 
-<file path=ppt/slides/slide14.xml><?xml version="1.0" encoding="utf-8"?>
-<p:sld xmlns:a="http://schemas.openxmlformats.org/drawingml/2006/main" xmlns:p="http://schemas.openxmlformats.org/presentationml/2006/main" xmlns:r="http://schemas.openxmlformats.org/officeDocument/2006/relationships">
+<file path=ppt/slides/slide8.xml><?xml version="1.0" encoding="utf-8"?>
+<p:sld xmlns:a="http://schemas.openxmlformats.org/drawingml/2006/main" xmlns:r="http://schemas.openxmlformats.org/officeDocument/2006/relationships" xmlns:p="http://schemas.openxmlformats.org/presentationml/2006/main">
   <p:cSld>
     <p:spTree>
       <p:nvGrpSpPr>
@@ -7006,7 +8767,14 @@
         <p:cNvGrpSpPr/>
         <p:nvPr/>
       </p:nvGrpSpPr>
-      <p:grpSpPr/>
+      <p:grpSpPr>
+        <a:xfrm>
+          <a:off x="0" y="0"/>
+          <a:ext cx="0" cy="0"/>
+          <a:chOff x="0" y="0"/>
+          <a:chExt cx="0" cy="0"/>
+        </a:xfrm>
+      </p:grpSpPr>
       <p:sp>
         <p:nvSpPr>
           <p:cNvPr id="2" name="Title 1"/>
@@ -7023,13 +8791,16 @@
           <a:lstStyle/>
           <a:p>
             <a:r>
-              <a:rPr sz="3200" b="1">
-                <a:solidFill>
-                  <a:srgbClr val="CC0066"/>
-                </a:solidFill>
+              <a:rPr sz="3200" b="1" dirty="0" err="1">
                 <a:latin typeface="Calibri"/>
               </a:rPr>
-              <a:t>do_install and FILES</a:t>
+              <a:t>do_install</a:t>
+            </a:r>
+            <a:r>
+              <a:rPr sz="3200" b="1" dirty="0">
+                <a:latin typeface="Calibri"/>
+              </a:rPr>
+              <a:t> and FILES</a:t>
             </a:r>
           </a:p>
         </p:txBody>
@@ -7051,7 +8822,7 @@
           <a:noFill/>
         </p:spPr>
         <p:txBody>
-          <a:bodyPr wrap="square" anchor="t" lIns="45720" rIns="45720">
+          <a:bodyPr wrap="square" lIns="45720" rIns="45720" anchor="t">
             <a:spAutoFit/>
           </a:bodyPr>
           <a:lstStyle/>
@@ -7112,6 +8883,7 @@
           <a:lstStyle/>
           <a:p>
             <a:pPr algn="ctr"/>
+            <a:endParaRPr/>
           </a:p>
         </p:txBody>
       </p:sp>
@@ -7156,6 +8928,7 @@
           <a:lstStyle/>
           <a:p>
             <a:pPr algn="ctr"/>
+            <a:endParaRPr/>
           </a:p>
         </p:txBody>
       </p:sp>
@@ -7168,7 +8941,7 @@
         <p:spPr>
           <a:xfrm>
             <a:off x="1005840" y="1874519"/>
-            <a:ext cx="10241280" cy="4389120"/>
+            <a:ext cx="10241280" cy="4185761"/>
           </a:xfrm>
           <a:prstGeom prst="rect">
             <a:avLst/>
@@ -7187,7 +8960,7 @@
               </a:spcAft>
             </a:pPr>
             <a:r>
-              <a:rPr sz="1100" i="1">
+              <a:rPr sz="1400" i="1">
                 <a:solidFill>
                   <a:srgbClr val="808080"/>
                 </a:solidFill>
@@ -7203,7 +8976,7 @@
               </a:spcAft>
             </a:pPr>
             <a:r>
-              <a:rPr sz="1100" i="1">
+              <a:rPr sz="1400" i="1">
                 <a:solidFill>
                   <a:srgbClr val="808080"/>
                 </a:solidFill>
@@ -7219,7 +8992,7 @@
               </a:spcAft>
             </a:pPr>
             <a:r>
-              <a:rPr sz="1100">
+              <a:rPr sz="1400">
                 <a:solidFill>
                   <a:srgbClr val="2D2D2D"/>
                 </a:solidFill>
@@ -7235,7 +9008,7 @@
               </a:spcAft>
             </a:pPr>
             <a:r>
-              <a:rPr sz="1100">
+              <a:rPr sz="1400">
                 <a:solidFill>
                   <a:srgbClr val="2D2D2D"/>
                 </a:solidFill>
@@ -7251,7 +9024,7 @@
               </a:spcAft>
             </a:pPr>
             <a:r>
-              <a:rPr sz="1100">
+              <a:rPr sz="1400">
                 <a:solidFill>
                   <a:srgbClr val="2D2D2D"/>
                 </a:solidFill>
@@ -7267,7 +9040,7 @@
               </a:spcAft>
             </a:pPr>
             <a:r>
-              <a:rPr sz="1100">
+              <a:rPr sz="1400">
                 <a:solidFill>
                   <a:srgbClr val="2D2D2D"/>
                 </a:solidFill>
@@ -7283,7 +9056,7 @@
               </a:spcAft>
             </a:pPr>
             <a:r>
-              <a:rPr sz="1100">
+              <a:rPr sz="1400">
                 <a:solidFill>
                   <a:srgbClr val="2D2D2D"/>
                 </a:solidFill>
@@ -7299,7 +9072,7 @@
               </a:spcAft>
             </a:pPr>
             <a:r>
-              <a:rPr sz="1100">
+              <a:rPr sz="1400">
                 <a:solidFill>
                   <a:srgbClr val="2D2D2D"/>
                 </a:solidFill>
@@ -7315,7 +9088,7 @@
               </a:spcAft>
             </a:pPr>
             <a:r>
-              <a:rPr sz="1100">
+              <a:rPr sz="1400">
                 <a:solidFill>
                   <a:srgbClr val="2D2D2D"/>
                 </a:solidFill>
@@ -7331,7 +9104,7 @@
               </a:spcAft>
             </a:pPr>
             <a:r>
-              <a:rPr sz="1100">
+              <a:rPr sz="1400">
                 <a:solidFill>
                   <a:srgbClr val="2D2D2D"/>
                 </a:solidFill>
@@ -7347,7 +9120,7 @@
               </a:spcAft>
             </a:pPr>
             <a:r>
-              <a:rPr sz="1100">
+              <a:rPr sz="1400">
                 <a:solidFill>
                   <a:srgbClr val="2D2D2D"/>
                 </a:solidFill>
@@ -7363,7 +9136,7 @@
               </a:spcAft>
             </a:pPr>
             <a:r>
-              <a:rPr sz="1100">
+              <a:rPr sz="1400">
                 <a:solidFill>
                   <a:srgbClr val="2D2D2D"/>
                 </a:solidFill>
@@ -7379,7 +9152,7 @@
               </a:spcAft>
             </a:pPr>
             <a:r>
-              <a:rPr sz="1100">
+              <a:rPr sz="1400">
                 <a:solidFill>
                   <a:srgbClr val="2D2D2D"/>
                 </a:solidFill>
@@ -7395,7 +9168,7 @@
               </a:spcAft>
             </a:pPr>
             <a:r>
-              <a:rPr sz="1100">
+              <a:rPr sz="1400">
                 <a:solidFill>
                   <a:srgbClr val="2D2D2D"/>
                 </a:solidFill>
@@ -7411,7 +9184,7 @@
               </a:spcAft>
             </a:pPr>
             <a:r>
-              <a:rPr sz="1100" i="1">
+              <a:rPr sz="1400" i="1">
                 <a:solidFill>
                   <a:srgbClr val="808080"/>
                 </a:solidFill>
@@ -7427,7 +9200,7 @@
               </a:spcAft>
             </a:pPr>
             <a:r>
-              <a:rPr sz="1100">
+              <a:rPr sz="1400">
                 <a:solidFill>
                   <a:srgbClr val="2D2D2D"/>
                 </a:solidFill>
@@ -7443,7 +9216,7 @@
               </a:spcAft>
             </a:pPr>
             <a:r>
-              <a:rPr sz="1100">
+              <a:rPr sz="1400">
                 <a:solidFill>
                   <a:srgbClr val="2D2D2D"/>
                 </a:solidFill>
@@ -7459,7 +9232,7 @@
               </a:spcAft>
             </a:pPr>
             <a:r>
-              <a:rPr sz="1100">
+              <a:rPr sz="1400">
                 <a:solidFill>
                   <a:srgbClr val="2D2D2D"/>
                 </a:solidFill>
@@ -7475,7 +9248,7 @@
               </a:spcAft>
             </a:pPr>
             <a:r>
-              <a:rPr sz="1100" i="1">
+              <a:rPr sz="1400" i="1">
                 <a:solidFill>
                   <a:srgbClr val="808080"/>
                 </a:solidFill>
@@ -7494,8 +9267,8 @@
 </p:sld>
 </file>
 
-<file path=ppt/slides/slide15.xml><?xml version="1.0" encoding="utf-8"?>
-<p:sld xmlns:a="http://schemas.openxmlformats.org/drawingml/2006/main" xmlns:p="http://schemas.openxmlformats.org/presentationml/2006/main" xmlns:r="http://schemas.openxmlformats.org/officeDocument/2006/relationships">
+<file path=ppt/slides/slide9.xml><?xml version="1.0" encoding="utf-8"?>
+<p:sld xmlns:a="http://schemas.openxmlformats.org/drawingml/2006/main" xmlns:r="http://schemas.openxmlformats.org/officeDocument/2006/relationships" xmlns:p="http://schemas.openxmlformats.org/presentationml/2006/main">
   <p:cSld>
     <p:spTree>
       <p:nvGrpSpPr>
@@ -7503,7 +9276,14 @@
         <p:cNvGrpSpPr/>
         <p:nvPr/>
       </p:nvGrpSpPr>
-      <p:grpSpPr/>
+      <p:grpSpPr>
+        <a:xfrm>
+          <a:off x="0" y="0"/>
+          <a:ext cx="0" cy="0"/>
+          <a:chOff x="0" y="0"/>
+          <a:chExt cx="0" cy="0"/>
+        </a:xfrm>
+      </p:grpSpPr>
       <p:sp>
         <p:nvSpPr>
           <p:cNvPr id="2" name="Title 1"/>
@@ -7520,10 +9300,7 @@
           <a:lstStyle/>
           <a:p>
             <a:r>
-              <a:rPr sz="3200" b="1">
-                <a:solidFill>
-                  <a:srgbClr val="CC0066"/>
-                </a:solidFill>
+              <a:rPr sz="3200" b="1" dirty="0">
                 <a:latin typeface="Calibri"/>
               </a:rPr>
               <a:t>DEPENDS vs RDEPENDS</a:t>
@@ -7548,7 +9325,7 @@
           <a:noFill/>
         </p:spPr>
         <p:txBody>
-          <a:bodyPr wrap="square" anchor="t" lIns="45720" rIns="45720">
+          <a:bodyPr wrap="square" lIns="45720" rIns="45720" anchor="t">
             <a:spAutoFit/>
           </a:bodyPr>
           <a:lstStyle/>
@@ -7609,6 +9386,7 @@
           <a:lstStyle/>
           <a:p>
             <a:pPr algn="ctr"/>
+            <a:endParaRPr/>
           </a:p>
         </p:txBody>
       </p:sp>
@@ -7629,7 +9407,7 @@
           <a:noFill/>
         </p:spPr>
         <p:txBody>
-          <a:bodyPr wrap="square" anchor="t" lIns="45720" rIns="45720">
+          <a:bodyPr wrap="square" lIns="45720" rIns="45720" anchor="t">
             <a:spAutoFit/>
           </a:bodyPr>
           <a:lstStyle/>
@@ -7656,7 +9434,7 @@
         <p:spPr>
           <a:xfrm>
             <a:off x="960120" y="2468880"/>
-            <a:ext cx="4937760" cy="3794760"/>
+            <a:ext cx="4937760" cy="2190343"/>
           </a:xfrm>
           <a:prstGeom prst="rect">
             <a:avLst/>
@@ -7675,7 +9453,7 @@
               </a:spcAft>
             </a:pPr>
             <a:r>
-              <a:rPr sz="1300" b="1" i="0">
+              <a:rPr sz="1600" b="1" i="0">
                 <a:solidFill>
                   <a:srgbClr val="333333"/>
                 </a:solidFill>
@@ -7691,7 +9469,7 @@
               </a:spcAft>
             </a:pPr>
             <a:r>
-              <a:rPr sz="1200" b="0" i="0">
+              <a:rPr sz="1600" b="0" i="0">
                 <a:solidFill>
                   <a:srgbClr val="333333"/>
                 </a:solidFill>
@@ -7707,7 +9485,7 @@
               </a:spcAft>
             </a:pPr>
             <a:r>
-              <a:rPr sz="1200" b="0" i="0">
+              <a:rPr sz="1600" b="0" i="0">
                 <a:solidFill>
                   <a:srgbClr val="333333"/>
                 </a:solidFill>
@@ -7723,7 +9501,7 @@
               </a:spcAft>
             </a:pPr>
             <a:r>
-              <a:rPr sz="1200" b="0" i="0">
+              <a:rPr sz="1600" b="0" i="0">
                 <a:solidFill>
                   <a:srgbClr val="333333"/>
                 </a:solidFill>
@@ -7739,7 +9517,7 @@
               </a:spcAft>
             </a:pPr>
             <a:r>
-              <a:rPr sz="1200" b="1" i="0">
+              <a:rPr sz="1600" b="1" i="0">
                 <a:solidFill>
                   <a:srgbClr val="CC0066"/>
                 </a:solidFill>
@@ -7755,7 +9533,7 @@
               </a:spcAft>
             </a:pPr>
             <a:r>
-              <a:rPr sz="1100" b="0" i="0">
+              <a:rPr sz="1400" b="0" i="0">
                 <a:solidFill>
                   <a:srgbClr val="333333"/>
                 </a:solidFill>
@@ -7771,7 +9549,7 @@
               </a:spcAft>
             </a:pPr>
             <a:r>
-              <a:rPr sz="1100" b="0" i="1">
+              <a:rPr sz="1400" b="0" i="1">
                 <a:solidFill>
                   <a:srgbClr val="333333"/>
                 </a:solidFill>
@@ -7825,6 +9603,7 @@
           <a:lstStyle/>
           <a:p>
             <a:pPr algn="ctr"/>
+            <a:endParaRPr/>
           </a:p>
         </p:txBody>
       </p:sp>
@@ -7845,7 +9624,7 @@
           <a:noFill/>
         </p:spPr>
         <p:txBody>
-          <a:bodyPr wrap="square" anchor="t" lIns="45720" rIns="45720">
+          <a:bodyPr wrap="square" lIns="45720" rIns="45720" anchor="t">
             <a:spAutoFit/>
           </a:bodyPr>
           <a:lstStyle/>
@@ -7872,7 +9651,7 @@
         <p:spPr>
           <a:xfrm>
             <a:off x="6400800" y="2468880"/>
-            <a:ext cx="4937760" cy="3794760"/>
+            <a:ext cx="4937760" cy="2190343"/>
           </a:xfrm>
           <a:prstGeom prst="rect">
             <a:avLst/>
@@ -7891,7 +9670,7 @@
               </a:spcAft>
             </a:pPr>
             <a:r>
-              <a:rPr sz="1300" b="1" i="0">
+              <a:rPr sz="1600" b="1" i="0">
                 <a:solidFill>
                   <a:srgbClr val="333333"/>
                 </a:solidFill>
@@ -7907,7 +9686,7 @@
               </a:spcAft>
             </a:pPr>
             <a:r>
-              <a:rPr sz="1200" b="0" i="0">
+              <a:rPr sz="1600" b="0" i="0">
                 <a:solidFill>
                   <a:srgbClr val="333333"/>
                 </a:solidFill>
@@ -7923,7 +9702,7 @@
               </a:spcAft>
             </a:pPr>
             <a:r>
-              <a:rPr sz="1200" b="0" i="0">
+              <a:rPr sz="1600" b="0" i="0">
                 <a:solidFill>
                   <a:srgbClr val="333333"/>
                 </a:solidFill>
@@ -7939,7 +9718,7 @@
               </a:spcAft>
             </a:pPr>
             <a:r>
-              <a:rPr sz="1200" b="0" i="0">
+              <a:rPr sz="1600" b="0" i="0">
                 <a:solidFill>
                   <a:srgbClr val="333333"/>
                 </a:solidFill>
@@ -7955,7 +9734,7 @@
               </a:spcAft>
             </a:pPr>
             <a:r>
-              <a:rPr sz="1200" b="1" i="0">
+              <a:rPr sz="1600" b="1" i="0">
                 <a:solidFill>
                   <a:srgbClr val="663399"/>
                 </a:solidFill>
@@ -7971,7 +9750,7 @@
               </a:spcAft>
             </a:pPr>
             <a:r>
-              <a:rPr sz="1100" b="0" i="0">
+              <a:rPr sz="1400" b="0" i="0">
                 <a:solidFill>
                   <a:srgbClr val="333333"/>
                 </a:solidFill>
@@ -7987,7 +9766,7 @@
               </a:spcAft>
             </a:pPr>
             <a:r>
-              <a:rPr sz="1100" b="0" i="1">
+              <a:rPr sz="1400" b="0" i="1">
                 <a:solidFill>
                   <a:srgbClr val="333333"/>
                 </a:solidFill>
@@ -8006,7 +9785,7 @@
         </p:nvSpPr>
         <p:spPr>
           <a:xfrm>
-            <a:off x="822960" y="6035040"/>
+            <a:off x="950779" y="5989320"/>
             <a:ext cx="10515600" cy="365760"/>
           </a:xfrm>
           <a:prstGeom prst="roundRect">
@@ -8035,1487 +9814,18 @@
           </a:fontRef>
         </p:style>
         <p:txBody>
-          <a:bodyPr rtlCol="0" anchor="ctr" lIns="228600" rIns="228600" wrap="square"/>
+          <a:bodyPr wrap="square" lIns="228600" rIns="228600" rtlCol="0" anchor="ctr"/>
           <a:lstStyle/>
           <a:p>
             <a:pPr algn="l"/>
             <a:r>
-              <a:rPr sz="1300" b="1">
+              <a:rPr sz="1300" b="1" dirty="0">
                 <a:solidFill>
                   <a:srgbClr val="663399"/>
                 </a:solidFill>
                 <a:latin typeface="Calibri"/>
               </a:rPr>
               <a:t>90% of 'works on host, fails on target' bugs trace to missing RDEPENDS.</a:t>
-            </a:r>
-          </a:p>
-        </p:txBody>
-      </p:sp>
-    </p:spTree>
-  </p:cSld>
-  <p:clrMapOvr>
-    <a:masterClrMapping/>
-  </p:clrMapOvr>
-</p:sld>
-</file>
-
-<file path=ppt/slides/slide16.xml><?xml version="1.0" encoding="utf-8"?>
-<p:sld xmlns:a="http://schemas.openxmlformats.org/drawingml/2006/main" xmlns:p="http://schemas.openxmlformats.org/presentationml/2006/main" xmlns:r="http://schemas.openxmlformats.org/officeDocument/2006/relationships">
-  <p:cSld>
-    <p:spTree>
-      <p:nvGrpSpPr>
-        <p:cNvPr id="1" name=""/>
-        <p:cNvGrpSpPr/>
-        <p:nvPr/>
-      </p:nvGrpSpPr>
-      <p:grpSpPr/>
-      <p:sp>
-        <p:nvSpPr>
-          <p:cNvPr id="2" name="Title 1"/>
-          <p:cNvSpPr>
-            <a:spLocks noGrp="1"/>
-          </p:cNvSpPr>
-          <p:nvPr>
-            <p:ph type="title"/>
-          </p:nvPr>
-        </p:nvSpPr>
-        <p:spPr/>
-        <p:txBody>
-          <a:bodyPr/>
-          <a:lstStyle/>
-          <a:p>
-            <a:r>
-              <a:rPr sz="3200" b="1">
-                <a:solidFill>
-                  <a:srgbClr val="663399"/>
-                </a:solidFill>
-                <a:latin typeface="Calibri"/>
-              </a:rPr>
-              <a:t>Session Summary</a:t>
-            </a:r>
-          </a:p>
-        </p:txBody>
-      </p:sp>
-      <p:sp>
-        <p:nvSpPr>
-          <p:cNvPr id="3" name="TextBox 2"/>
-          <p:cNvSpPr txBox="1"/>
-          <p:nvPr/>
-        </p:nvSpPr>
-        <p:spPr>
-          <a:xfrm>
-            <a:off x="822960" y="1417320"/>
-            <a:ext cx="10515600" cy="365760"/>
-          </a:xfrm>
-          <a:prstGeom prst="rect">
-            <a:avLst/>
-          </a:prstGeom>
-          <a:noFill/>
-        </p:spPr>
-        <p:txBody>
-          <a:bodyPr wrap="square" anchor="t" lIns="45720" rIns="45720">
-            <a:spAutoFit/>
-          </a:bodyPr>
-          <a:lstStyle/>
-          <a:p>
-            <a:pPr algn="l"/>
-            <a:r>
-              <a:rPr sz="1500" b="0" i="1">
-                <a:solidFill>
-                  <a:srgbClr val="666666"/>
-                </a:solidFill>
-                <a:latin typeface="Calibri"/>
-              </a:rPr>
-              <a:t>5 things to remember from this session.</a:t>
-            </a:r>
-          </a:p>
-        </p:txBody>
-      </p:sp>
-      <p:sp>
-        <p:nvSpPr>
-          <p:cNvPr id="4" name="Rounded Rectangle 3"/>
-          <p:cNvSpPr/>
-          <p:nvPr/>
-        </p:nvSpPr>
-        <p:spPr>
-          <a:xfrm>
-            <a:off x="822960" y="1874519"/>
-            <a:ext cx="457200" cy="548640"/>
-          </a:xfrm>
-          <a:prstGeom prst="roundRect">
-            <a:avLst/>
-          </a:prstGeom>
-          <a:solidFill>
-            <a:srgbClr val="CC0066"/>
-          </a:solidFill>
-          <a:ln>
-            <a:noFill/>
-          </a:ln>
-          <a:effectLst/>
-        </p:spPr>
-        <p:style>
-          <a:lnRef idx="1">
-            <a:schemeClr val="accent1"/>
-          </a:lnRef>
-          <a:fillRef idx="3">
-            <a:schemeClr val="accent1"/>
-          </a:fillRef>
-          <a:effectRef idx="2">
-            <a:schemeClr val="accent1"/>
-          </a:effectRef>
-          <a:fontRef idx="minor">
-            <a:schemeClr val="lt1"/>
-          </a:fontRef>
-        </p:style>
-        <p:txBody>
-          <a:bodyPr rtlCol="0" anchor="ctr" lIns="0" rIns="0"/>
-          <a:lstStyle/>
-          <a:p>
-            <a:pPr algn="ctr"/>
-            <a:r>
-              <a:rPr sz="2200" b="1">
-                <a:solidFill>
-                  <a:srgbClr val="FFFFFF"/>
-                </a:solidFill>
-                <a:latin typeface="Calibri"/>
-              </a:rPr>
-              <a:t>1</a:t>
-            </a:r>
-          </a:p>
-        </p:txBody>
-      </p:sp>
-      <p:sp>
-        <p:nvSpPr>
-          <p:cNvPr id="5" name="TextBox 4"/>
-          <p:cNvSpPr txBox="1"/>
-          <p:nvPr/>
-        </p:nvSpPr>
-        <p:spPr>
-          <a:xfrm>
-            <a:off x="1417320" y="1874519"/>
-            <a:ext cx="10058400" cy="320040"/>
-          </a:xfrm>
-          <a:prstGeom prst="rect">
-            <a:avLst/>
-          </a:prstGeom>
-          <a:noFill/>
-        </p:spPr>
-        <p:txBody>
-          <a:bodyPr wrap="square" anchor="t" lIns="45720" rIns="45720">
-            <a:spAutoFit/>
-          </a:bodyPr>
-          <a:lstStyle/>
-          <a:p>
-            <a:pPr algn="l"/>
-            <a:r>
-              <a:rPr sz="1600" b="1" i="0">
-                <a:solidFill>
-                  <a:srgbClr val="663399"/>
-                </a:solidFill>
-                <a:latin typeface="Calibri"/>
-              </a:rPr>
-              <a:t>local.conf, bblayers.conf are your build cockpit</a:t>
-            </a:r>
-          </a:p>
-        </p:txBody>
-      </p:sp>
-      <p:sp>
-        <p:nvSpPr>
-          <p:cNvPr id="6" name="TextBox 5"/>
-          <p:cNvSpPr txBox="1"/>
-          <p:nvPr/>
-        </p:nvSpPr>
-        <p:spPr>
-          <a:xfrm>
-            <a:off x="1417320" y="2185415"/>
-            <a:ext cx="10058400" cy="320040"/>
-          </a:xfrm>
-          <a:prstGeom prst="rect">
-            <a:avLst/>
-          </a:prstGeom>
-          <a:noFill/>
-        </p:spPr>
-        <p:txBody>
-          <a:bodyPr wrap="square" anchor="t" lIns="45720" rIns="45720">
-            <a:spAutoFit/>
-          </a:bodyPr>
-          <a:lstStyle/>
-          <a:p>
-            <a:pPr algn="l"/>
-            <a:r>
-              <a:rPr sz="1300" b="0" i="0">
-                <a:solidFill>
-                  <a:srgbClr val="333333"/>
-                </a:solidFill>
-                <a:latin typeface="Calibri"/>
-              </a:rPr>
-              <a:t>Distro and machine configs are reusable policy + hardware</a:t>
-            </a:r>
-          </a:p>
-        </p:txBody>
-      </p:sp>
-      <p:sp>
-        <p:nvSpPr>
-          <p:cNvPr id="7" name="Rounded Rectangle 6"/>
-          <p:cNvSpPr/>
-          <p:nvPr/>
-        </p:nvSpPr>
-        <p:spPr>
-          <a:xfrm>
-            <a:off x="822960" y="2587752"/>
-            <a:ext cx="457200" cy="548640"/>
-          </a:xfrm>
-          <a:prstGeom prst="roundRect">
-            <a:avLst/>
-          </a:prstGeom>
-          <a:solidFill>
-            <a:srgbClr val="CC0066"/>
-          </a:solidFill>
-          <a:ln>
-            <a:noFill/>
-          </a:ln>
-          <a:effectLst/>
-        </p:spPr>
-        <p:style>
-          <a:lnRef idx="1">
-            <a:schemeClr val="accent1"/>
-          </a:lnRef>
-          <a:fillRef idx="3">
-            <a:schemeClr val="accent1"/>
-          </a:fillRef>
-          <a:effectRef idx="2">
-            <a:schemeClr val="accent1"/>
-          </a:effectRef>
-          <a:fontRef idx="minor">
-            <a:schemeClr val="lt1"/>
-          </a:fontRef>
-        </p:style>
-        <p:txBody>
-          <a:bodyPr rtlCol="0" anchor="ctr" lIns="0" rIns="0"/>
-          <a:lstStyle/>
-          <a:p>
-            <a:pPr algn="ctr"/>
-            <a:r>
-              <a:rPr sz="2200" b="1">
-                <a:solidFill>
-                  <a:srgbClr val="FFFFFF"/>
-                </a:solidFill>
-                <a:latin typeface="Calibri"/>
-              </a:rPr>
-              <a:t>2</a:t>
-            </a:r>
-          </a:p>
-        </p:txBody>
-      </p:sp>
-      <p:sp>
-        <p:nvSpPr>
-          <p:cNvPr id="8" name="TextBox 7"/>
-          <p:cNvSpPr txBox="1"/>
-          <p:nvPr/>
-        </p:nvSpPr>
-        <p:spPr>
-          <a:xfrm>
-            <a:off x="1417320" y="2587752"/>
-            <a:ext cx="10058400" cy="320040"/>
-          </a:xfrm>
-          <a:prstGeom prst="rect">
-            <a:avLst/>
-          </a:prstGeom>
-          <a:noFill/>
-        </p:spPr>
-        <p:txBody>
-          <a:bodyPr wrap="square" anchor="t" lIns="45720" rIns="45720">
-            <a:spAutoFit/>
-          </a:bodyPr>
-          <a:lstStyle/>
-          <a:p>
-            <a:pPr algn="l"/>
-            <a:r>
-              <a:rPr sz="1600" b="1" i="0">
-                <a:solidFill>
-                  <a:srgbClr val="663399"/>
-                </a:solidFill>
-                <a:latin typeface="Calibri"/>
-              </a:rPr>
-              <a:t>Every recipe has the same skeleton</a:t>
-            </a:r>
-          </a:p>
-        </p:txBody>
-      </p:sp>
-      <p:sp>
-        <p:nvSpPr>
-          <p:cNvPr id="9" name="TextBox 8"/>
-          <p:cNvSpPr txBox="1"/>
-          <p:nvPr/>
-        </p:nvSpPr>
-        <p:spPr>
-          <a:xfrm>
-            <a:off x="1417320" y="2898648"/>
-            <a:ext cx="10058400" cy="320040"/>
-          </a:xfrm>
-          <a:prstGeom prst="rect">
-            <a:avLst/>
-          </a:prstGeom>
-          <a:noFill/>
-        </p:spPr>
-        <p:txBody>
-          <a:bodyPr wrap="square" anchor="t" lIns="45720" rIns="45720">
-            <a:spAutoFit/>
-          </a:bodyPr>
-          <a:lstStyle/>
-          <a:p>
-            <a:pPr algn="l"/>
-            <a:r>
-              <a:rPr sz="1300" b="0" i="0">
-                <a:solidFill>
-                  <a:srgbClr val="333333"/>
-                </a:solidFill>
-                <a:latin typeface="Calibri"/>
-              </a:rPr>
-              <a:t>Metadata, SRC_URI, S, dependencies, do_install</a:t>
-            </a:r>
-          </a:p>
-        </p:txBody>
-      </p:sp>
-      <p:sp>
-        <p:nvSpPr>
-          <p:cNvPr id="10" name="Rounded Rectangle 9"/>
-          <p:cNvSpPr/>
-          <p:nvPr/>
-        </p:nvSpPr>
-        <p:spPr>
-          <a:xfrm>
-            <a:off x="822960" y="3300984"/>
-            <a:ext cx="457200" cy="548640"/>
-          </a:xfrm>
-          <a:prstGeom prst="roundRect">
-            <a:avLst/>
-          </a:prstGeom>
-          <a:solidFill>
-            <a:srgbClr val="CC0066"/>
-          </a:solidFill>
-          <a:ln>
-            <a:noFill/>
-          </a:ln>
-          <a:effectLst/>
-        </p:spPr>
-        <p:style>
-          <a:lnRef idx="1">
-            <a:schemeClr val="accent1"/>
-          </a:lnRef>
-          <a:fillRef idx="3">
-            <a:schemeClr val="accent1"/>
-          </a:fillRef>
-          <a:effectRef idx="2">
-            <a:schemeClr val="accent1"/>
-          </a:effectRef>
-          <a:fontRef idx="minor">
-            <a:schemeClr val="lt1"/>
-          </a:fontRef>
-        </p:style>
-        <p:txBody>
-          <a:bodyPr rtlCol="0" anchor="ctr" lIns="0" rIns="0"/>
-          <a:lstStyle/>
-          <a:p>
-            <a:pPr algn="ctr"/>
-            <a:r>
-              <a:rPr sz="2200" b="1">
-                <a:solidFill>
-                  <a:srgbClr val="FFFFFF"/>
-                </a:solidFill>
-                <a:latin typeface="Calibri"/>
-              </a:rPr>
-              <a:t>3</a:t>
-            </a:r>
-          </a:p>
-        </p:txBody>
-      </p:sp>
-      <p:sp>
-        <p:nvSpPr>
-          <p:cNvPr id="11" name="TextBox 10"/>
-          <p:cNvSpPr txBox="1"/>
-          <p:nvPr/>
-        </p:nvSpPr>
-        <p:spPr>
-          <a:xfrm>
-            <a:off x="1417320" y="3300984"/>
-            <a:ext cx="10058400" cy="320040"/>
-          </a:xfrm>
-          <a:prstGeom prst="rect">
-            <a:avLst/>
-          </a:prstGeom>
-          <a:noFill/>
-        </p:spPr>
-        <p:txBody>
-          <a:bodyPr wrap="square" anchor="t" lIns="45720" rIns="45720">
-            <a:spAutoFit/>
-          </a:bodyPr>
-          <a:lstStyle/>
-          <a:p>
-            <a:pPr algn="l"/>
-            <a:r>
-              <a:rPr sz="1600" b="1" i="0">
-                <a:solidFill>
-                  <a:srgbClr val="663399"/>
-                </a:solidFill>
-                <a:latin typeface="Calibri"/>
-              </a:rPr>
-              <a:t>SRC_URI fetches; SRC_URI[sha256sum] verifies</a:t>
-            </a:r>
-          </a:p>
-        </p:txBody>
-      </p:sp>
-      <p:sp>
-        <p:nvSpPr>
-          <p:cNvPr id="12" name="TextBox 11"/>
-          <p:cNvSpPr txBox="1"/>
-          <p:nvPr/>
-        </p:nvSpPr>
-        <p:spPr>
-          <a:xfrm>
-            <a:off x="1417320" y="3611879"/>
-            <a:ext cx="10058400" cy="320040"/>
-          </a:xfrm>
-          <a:prstGeom prst="rect">
-            <a:avLst/>
-          </a:prstGeom>
-          <a:noFill/>
-        </p:spPr>
-        <p:txBody>
-          <a:bodyPr wrap="square" anchor="t" lIns="45720" rIns="45720">
-            <a:spAutoFit/>
-          </a:bodyPr>
-          <a:lstStyle/>
-          <a:p>
-            <a:pPr algn="l"/>
-            <a:r>
-              <a:rPr sz="1300" b="0" i="0">
-                <a:solidFill>
-                  <a:srgbClr val="333333"/>
-                </a:solidFill>
-                <a:latin typeface="Calibri"/>
-              </a:rPr>
-              <a:t>Multiple sources can be combined; patches apply automatically</a:t>
-            </a:r>
-          </a:p>
-        </p:txBody>
-      </p:sp>
-      <p:sp>
-        <p:nvSpPr>
-          <p:cNvPr id="13" name="Rounded Rectangle 12"/>
-          <p:cNvSpPr/>
-          <p:nvPr/>
-        </p:nvSpPr>
-        <p:spPr>
-          <a:xfrm>
-            <a:off x="822960" y="4014215"/>
-            <a:ext cx="457200" cy="548640"/>
-          </a:xfrm>
-          <a:prstGeom prst="roundRect">
-            <a:avLst/>
-          </a:prstGeom>
-          <a:solidFill>
-            <a:srgbClr val="CC0066"/>
-          </a:solidFill>
-          <a:ln>
-            <a:noFill/>
-          </a:ln>
-          <a:effectLst/>
-        </p:spPr>
-        <p:style>
-          <a:lnRef idx="1">
-            <a:schemeClr val="accent1"/>
-          </a:lnRef>
-          <a:fillRef idx="3">
-            <a:schemeClr val="accent1"/>
-          </a:fillRef>
-          <a:effectRef idx="2">
-            <a:schemeClr val="accent1"/>
-          </a:effectRef>
-          <a:fontRef idx="minor">
-            <a:schemeClr val="lt1"/>
-          </a:fontRef>
-        </p:style>
-        <p:txBody>
-          <a:bodyPr rtlCol="0" anchor="ctr" lIns="0" rIns="0"/>
-          <a:lstStyle/>
-          <a:p>
-            <a:pPr algn="ctr"/>
-            <a:r>
-              <a:rPr sz="2200" b="1">
-                <a:solidFill>
-                  <a:srgbClr val="FFFFFF"/>
-                </a:solidFill>
-                <a:latin typeface="Calibri"/>
-              </a:rPr>
-              <a:t>4</a:t>
-            </a:r>
-          </a:p>
-        </p:txBody>
-      </p:sp>
-      <p:sp>
-        <p:nvSpPr>
-          <p:cNvPr id="14" name="TextBox 13"/>
-          <p:cNvSpPr txBox="1"/>
-          <p:nvPr/>
-        </p:nvSpPr>
-        <p:spPr>
-          <a:xfrm>
-            <a:off x="1417320" y="4014215"/>
-            <a:ext cx="10058400" cy="320040"/>
-          </a:xfrm>
-          <a:prstGeom prst="rect">
-            <a:avLst/>
-          </a:prstGeom>
-          <a:noFill/>
-        </p:spPr>
-        <p:txBody>
-          <a:bodyPr wrap="square" anchor="t" lIns="45720" rIns="45720">
-            <a:spAutoFit/>
-          </a:bodyPr>
-          <a:lstStyle/>
-          <a:p>
-            <a:pPr algn="l"/>
-            <a:r>
-              <a:rPr sz="1600" b="1" i="0">
-                <a:solidFill>
-                  <a:srgbClr val="663399"/>
-                </a:solidFill>
-                <a:latin typeface="Calibri"/>
-              </a:rPr>
-              <a:t>do_install populates ${D}; FILES decides what ships</a:t>
-            </a:r>
-          </a:p>
-        </p:txBody>
-      </p:sp>
-      <p:sp>
-        <p:nvSpPr>
-          <p:cNvPr id="15" name="TextBox 14"/>
-          <p:cNvSpPr txBox="1"/>
-          <p:nvPr/>
-        </p:nvSpPr>
-        <p:spPr>
-          <a:xfrm>
-            <a:off x="1417320" y="4325112"/>
-            <a:ext cx="10058400" cy="320040"/>
-          </a:xfrm>
-          <a:prstGeom prst="rect">
-            <a:avLst/>
-          </a:prstGeom>
-          <a:noFill/>
-        </p:spPr>
-        <p:txBody>
-          <a:bodyPr wrap="square" anchor="t" lIns="45720" rIns="45720">
-            <a:spAutoFit/>
-          </a:bodyPr>
-          <a:lstStyle/>
-          <a:p>
-            <a:pPr algn="l"/>
-            <a:r>
-              <a:rPr sz="1300" b="0" i="0">
-                <a:solidFill>
-                  <a:srgbClr val="333333"/>
-                </a:solidFill>
-                <a:latin typeface="Calibri"/>
-              </a:rPr>
-              <a:t>Mismatch produces QA warnings — read them, don't ignore</a:t>
-            </a:r>
-          </a:p>
-        </p:txBody>
-      </p:sp>
-      <p:sp>
-        <p:nvSpPr>
-          <p:cNvPr id="16" name="Rounded Rectangle 15"/>
-          <p:cNvSpPr/>
-          <p:nvPr/>
-        </p:nvSpPr>
-        <p:spPr>
-          <a:xfrm>
-            <a:off x="822960" y="4727448"/>
-            <a:ext cx="457200" cy="548640"/>
-          </a:xfrm>
-          <a:prstGeom prst="roundRect">
-            <a:avLst/>
-          </a:prstGeom>
-          <a:solidFill>
-            <a:srgbClr val="CC0066"/>
-          </a:solidFill>
-          <a:ln>
-            <a:noFill/>
-          </a:ln>
-          <a:effectLst/>
-        </p:spPr>
-        <p:style>
-          <a:lnRef idx="1">
-            <a:schemeClr val="accent1"/>
-          </a:lnRef>
-          <a:fillRef idx="3">
-            <a:schemeClr val="accent1"/>
-          </a:fillRef>
-          <a:effectRef idx="2">
-            <a:schemeClr val="accent1"/>
-          </a:effectRef>
-          <a:fontRef idx="minor">
-            <a:schemeClr val="lt1"/>
-          </a:fontRef>
-        </p:style>
-        <p:txBody>
-          <a:bodyPr rtlCol="0" anchor="ctr" lIns="0" rIns="0"/>
-          <a:lstStyle/>
-          <a:p>
-            <a:pPr algn="ctr"/>
-            <a:r>
-              <a:rPr sz="2200" b="1">
-                <a:solidFill>
-                  <a:srgbClr val="FFFFFF"/>
-                </a:solidFill>
-                <a:latin typeface="Calibri"/>
-              </a:rPr>
-              <a:t>5</a:t>
-            </a:r>
-          </a:p>
-        </p:txBody>
-      </p:sp>
-      <p:sp>
-        <p:nvSpPr>
-          <p:cNvPr id="17" name="TextBox 16"/>
-          <p:cNvSpPr txBox="1"/>
-          <p:nvPr/>
-        </p:nvSpPr>
-        <p:spPr>
-          <a:xfrm>
-            <a:off x="1417320" y="4727448"/>
-            <a:ext cx="10058400" cy="320040"/>
-          </a:xfrm>
-          <a:prstGeom prst="rect">
-            <a:avLst/>
-          </a:prstGeom>
-          <a:noFill/>
-        </p:spPr>
-        <p:txBody>
-          <a:bodyPr wrap="square" anchor="t" lIns="45720" rIns="45720">
-            <a:spAutoFit/>
-          </a:bodyPr>
-          <a:lstStyle/>
-          <a:p>
-            <a:pPr algn="l"/>
-            <a:r>
-              <a:rPr sz="1600" b="1" i="0">
-                <a:solidFill>
-                  <a:srgbClr val="663399"/>
-                </a:solidFill>
-                <a:latin typeface="Calibri"/>
-              </a:rPr>
-              <a:t>DEPENDS = build; RDEPENDS = runtime</a:t>
-            </a:r>
-          </a:p>
-        </p:txBody>
-      </p:sp>
-      <p:sp>
-        <p:nvSpPr>
-          <p:cNvPr id="18" name="TextBox 17"/>
-          <p:cNvSpPr txBox="1"/>
-          <p:nvPr/>
-        </p:nvSpPr>
-        <p:spPr>
-          <a:xfrm>
-            <a:off x="1417320" y="5038344"/>
-            <a:ext cx="10058400" cy="320040"/>
-          </a:xfrm>
-          <a:prstGeom prst="rect">
-            <a:avLst/>
-          </a:prstGeom>
-          <a:noFill/>
-        </p:spPr>
-        <p:txBody>
-          <a:bodyPr wrap="square" anchor="t" lIns="45720" rIns="45720">
-            <a:spAutoFit/>
-          </a:bodyPr>
-          <a:lstStyle/>
-          <a:p>
-            <a:pPr algn="l"/>
-            <a:r>
-              <a:rPr sz="1300" b="0" i="0">
-                <a:solidFill>
-                  <a:srgbClr val="333333"/>
-                </a:solidFill>
-                <a:latin typeface="Calibri"/>
-              </a:rPr>
-              <a:t>Both are needed for a properly functioning shipped binary</a:t>
-            </a:r>
-          </a:p>
-        </p:txBody>
-      </p:sp>
-      <p:sp>
-        <p:nvSpPr>
-          <p:cNvPr id="19" name="Rounded Rectangle 18"/>
-          <p:cNvSpPr/>
-          <p:nvPr/>
-        </p:nvSpPr>
-        <p:spPr>
-          <a:xfrm>
-            <a:off x="822960" y="5669280"/>
-            <a:ext cx="10561320" cy="640080"/>
-          </a:xfrm>
-          <a:prstGeom prst="roundRect">
-            <a:avLst/>
-          </a:prstGeom>
-          <a:solidFill>
-            <a:srgbClr val="FBE6F0"/>
-          </a:solidFill>
-          <a:ln>
-            <a:noFill/>
-          </a:ln>
-          <a:effectLst/>
-        </p:spPr>
-        <p:style>
-          <a:lnRef idx="1">
-            <a:schemeClr val="accent1"/>
-          </a:lnRef>
-          <a:fillRef idx="3">
-            <a:schemeClr val="accent1"/>
-          </a:fillRef>
-          <a:effectRef idx="2">
-            <a:schemeClr val="accent1"/>
-          </a:effectRef>
-          <a:fontRef idx="minor">
-            <a:schemeClr val="lt1"/>
-          </a:fontRef>
-        </p:style>
-        <p:txBody>
-          <a:bodyPr rtlCol="0" anchor="ctr" lIns="228600"/>
-          <a:lstStyle/>
-          <a:p>
-            <a:pPr algn="ctr"/>
-            <a:r>
-              <a:rPr sz="1400" b="1">
-                <a:solidFill>
-                  <a:srgbClr val="663399"/>
-                </a:solidFill>
-                <a:latin typeface="Calibri"/>
-              </a:rPr>
-              <a:t>Next session  →  </a:t>
-            </a:r>
-            <a:r>
-              <a:rPr sz="1400">
-                <a:solidFill>
-                  <a:srgbClr val="333333"/>
-                </a:solidFill>
-                <a:latin typeface="Calibri"/>
-              </a:rPr>
-              <a:t>Recipes — Part 2 (60 min) — packaging and image composition</a:t>
-            </a:r>
-          </a:p>
-        </p:txBody>
-      </p:sp>
-    </p:spTree>
-  </p:cSld>
-  <p:clrMapOvr>
-    <a:masterClrMapping/>
-  </p:clrMapOvr>
-</p:sld>
-</file>
-
-<file path=ppt/slides/slide7.xml><?xml version="1.0" encoding="utf-8"?>
-<p:sld xmlns:a="http://schemas.openxmlformats.org/drawingml/2006/main" xmlns:p="http://schemas.openxmlformats.org/presentationml/2006/main" xmlns:r="http://schemas.openxmlformats.org/officeDocument/2006/relationships">
-  <p:cSld>
-    <p:spTree>
-      <p:nvGrpSpPr>
-        <p:cNvPr id="1" name=""/>
-        <p:cNvGrpSpPr/>
-        <p:nvPr/>
-      </p:nvGrpSpPr>
-      <p:grpSpPr/>
-      <p:sp>
-        <p:nvSpPr>
-          <p:cNvPr id="2" name="Title 1"/>
-          <p:cNvSpPr>
-            <a:spLocks noGrp="1"/>
-          </p:cNvSpPr>
-          <p:nvPr>
-            <p:ph type="ctrTitle"/>
-          </p:nvPr>
-        </p:nvSpPr>
-        <p:spPr/>
-        <p:txBody>
-          <a:bodyPr/>
-          <a:lstStyle/>
-          <a:p>
-            <a:r>
-              <a:rPr sz="4400" b="1">
-                <a:solidFill>
-                  <a:srgbClr val="FFFFFF"/>
-                </a:solidFill>
-                <a:latin typeface="Calibri"/>
-              </a:rPr>
-              <a:t>Recipes — Part 1</a:t>
-            </a:r>
-          </a:p>
-        </p:txBody>
-      </p:sp>
-      <p:sp>
-        <p:nvSpPr>
-          <p:cNvPr id="3" name="Subtitle 2"/>
-          <p:cNvSpPr>
-            <a:spLocks noGrp="1"/>
-          </p:cNvSpPr>
-          <p:nvPr>
-            <p:ph type="subTitle" idx="1"/>
-          </p:nvPr>
-        </p:nvSpPr>
-        <p:spPr/>
-        <p:txBody>
-          <a:bodyPr/>
-          <a:lstStyle/>
-          <a:p>
-            <a:r>
-              <a:rPr sz="2200" i="1">
-                <a:solidFill>
-                  <a:srgbClr val="FFFFFF"/>
-                </a:solidFill>
-                <a:latin typeface="Calibri"/>
-              </a:rPr>
-              <a:t>Day 2 • Session 2 • 75 minutes</a:t>
-            </a:r>
-          </a:p>
-          <a:p>
-            <a:r>
-              <a:rPr sz="1800">
-                <a:solidFill>
-                  <a:srgbClr val="FFFFFF"/>
-                </a:solidFill>
-                <a:latin typeface="Calibri"/>
-              </a:rPr>
-              <a:t>Workspace files and recipe anatomy</a:t>
-            </a:r>
-          </a:p>
-        </p:txBody>
-      </p:sp>
-    </p:spTree>
-  </p:cSld>
-  <p:clrMapOvr>
-    <a:masterClrMapping/>
-  </p:clrMapOvr>
-</p:sld>
-</file>
-
-<file path=ppt/slides/slide8.xml><?xml version="1.0" encoding="utf-8"?>
-<p:sld xmlns:a="http://schemas.openxmlformats.org/drawingml/2006/main" xmlns:p="http://schemas.openxmlformats.org/presentationml/2006/main" xmlns:r="http://schemas.openxmlformats.org/officeDocument/2006/relationships">
-  <p:cSld>
-    <p:spTree>
-      <p:nvGrpSpPr>
-        <p:cNvPr id="1" name=""/>
-        <p:cNvGrpSpPr/>
-        <p:nvPr/>
-      </p:nvGrpSpPr>
-      <p:grpSpPr/>
-      <p:sp>
-        <p:nvSpPr>
-          <p:cNvPr id="2" name="Title 1"/>
-          <p:cNvSpPr>
-            <a:spLocks noGrp="1"/>
-          </p:cNvSpPr>
-          <p:nvPr>
-            <p:ph type="title"/>
-          </p:nvPr>
-        </p:nvSpPr>
-        <p:spPr/>
-        <p:txBody>
-          <a:bodyPr/>
-          <a:lstStyle/>
-          <a:p>
-            <a:r>
-              <a:rPr sz="3200" b="1">
-                <a:solidFill>
-                  <a:srgbClr val="CC0066"/>
-                </a:solidFill>
-                <a:latin typeface="Calibri"/>
-              </a:rPr>
-              <a:t>Session Agenda</a:t>
-            </a:r>
-          </a:p>
-        </p:txBody>
-      </p:sp>
-      <p:sp>
-        <p:nvSpPr>
-          <p:cNvPr id="3" name="TextBox 2"/>
-          <p:cNvSpPr txBox="1"/>
-          <p:nvPr/>
-        </p:nvSpPr>
-        <p:spPr>
-          <a:xfrm>
-            <a:off x="822960" y="1463040"/>
-            <a:ext cx="10515600" cy="5029200"/>
-          </a:xfrm>
-          <a:prstGeom prst="rect">
-            <a:avLst/>
-          </a:prstGeom>
-          <a:noFill/>
-        </p:spPr>
-        <p:txBody>
-          <a:bodyPr wrap="square" lIns="45720" rIns="45720">
-            <a:spAutoFit/>
-          </a:bodyPr>
-          <a:lstStyle/>
-          <a:p>
-            <a:pPr>
-              <a:spcAft>
-                <a:spcPts val="600"/>
-              </a:spcAft>
-            </a:pPr>
-            <a:r>
-              <a:rPr sz="2000" b="0" i="0">
-                <a:solidFill>
-                  <a:srgbClr val="333333"/>
-                </a:solidFill>
-                <a:latin typeface="Calibri"/>
-              </a:rPr>
-              <a:t>1.  Workspace files: local.conf, bblayers.conf</a:t>
-            </a:r>
-          </a:p>
-          <a:p>
-            <a:pPr>
-              <a:spcAft>
-                <a:spcPts val="600"/>
-              </a:spcAft>
-            </a:pPr>
-            <a:r>
-              <a:rPr sz="2000" b="0" i="0">
-                <a:solidFill>
-                  <a:srgbClr val="333333"/>
-                </a:solidFill>
-                <a:latin typeface="Calibri"/>
-              </a:rPr>
-              <a:t>2.  Distro and machine config files</a:t>
-            </a:r>
-          </a:p>
-          <a:p>
-            <a:pPr>
-              <a:spcAft>
-                <a:spcPts val="600"/>
-              </a:spcAft>
-            </a:pPr>
-            <a:r>
-              <a:rPr sz="2000" b="0" i="0">
-                <a:solidFill>
-                  <a:srgbClr val="333333"/>
-                </a:solidFill>
-                <a:latin typeface="Calibri"/>
-              </a:rPr>
-              <a:t>3.  Anatomy of a recipe</a:t>
-            </a:r>
-          </a:p>
-          <a:p>
-            <a:pPr>
-              <a:spcAft>
-                <a:spcPts val="600"/>
-              </a:spcAft>
-            </a:pPr>
-            <a:r>
-              <a:rPr sz="2000" b="0" i="0">
-                <a:solidFill>
-                  <a:srgbClr val="333333"/>
-                </a:solidFill>
-                <a:latin typeface="Calibri"/>
-              </a:rPr>
-              <a:t>4.  SRC_URI — fetching source</a:t>
-            </a:r>
-          </a:p>
-          <a:p>
-            <a:pPr>
-              <a:spcAft>
-                <a:spcPts val="600"/>
-              </a:spcAft>
-            </a:pPr>
-            <a:r>
-              <a:rPr sz="2000" b="0" i="0">
-                <a:solidFill>
-                  <a:srgbClr val="333333"/>
-                </a:solidFill>
-                <a:latin typeface="Calibri"/>
-              </a:rPr>
-              <a:t>5.  Patches and SRC_URI checksums</a:t>
-            </a:r>
-          </a:p>
-          <a:p>
-            <a:pPr>
-              <a:spcAft>
-                <a:spcPts val="600"/>
-              </a:spcAft>
-            </a:pPr>
-            <a:r>
-              <a:rPr sz="2000" b="0" i="0">
-                <a:solidFill>
-                  <a:srgbClr val="333333"/>
-                </a:solidFill>
-                <a:latin typeface="Calibri"/>
-              </a:rPr>
-              <a:t>6.  do_install and FILES</a:t>
-            </a:r>
-          </a:p>
-          <a:p>
-            <a:pPr>
-              <a:spcAft>
-                <a:spcPts val="600"/>
-              </a:spcAft>
-            </a:pPr>
-            <a:r>
-              <a:rPr sz="2000" b="0" i="0">
-                <a:solidFill>
-                  <a:srgbClr val="333333"/>
-                </a:solidFill>
-                <a:latin typeface="Calibri"/>
-              </a:rPr>
-              <a:t>7.  RDEPENDS and DEPENDS</a:t>
-            </a:r>
-          </a:p>
-        </p:txBody>
-      </p:sp>
-    </p:spTree>
-  </p:cSld>
-  <p:clrMapOvr>
-    <a:masterClrMapping/>
-  </p:clrMapOvr>
-</p:sld>
-</file>
-
-<file path=ppt/slides/slide9.xml><?xml version="1.0" encoding="utf-8"?>
-<p:sld xmlns:a="http://schemas.openxmlformats.org/drawingml/2006/main" xmlns:p="http://schemas.openxmlformats.org/presentationml/2006/main" xmlns:r="http://schemas.openxmlformats.org/officeDocument/2006/relationships">
-  <p:cSld>
-    <p:spTree>
-      <p:nvGrpSpPr>
-        <p:cNvPr id="1" name=""/>
-        <p:cNvGrpSpPr/>
-        <p:nvPr/>
-      </p:nvGrpSpPr>
-      <p:grpSpPr/>
-      <p:sp>
-        <p:nvSpPr>
-          <p:cNvPr id="2" name="Title 1"/>
-          <p:cNvSpPr>
-            <a:spLocks noGrp="1"/>
-          </p:cNvSpPr>
-          <p:nvPr>
-            <p:ph type="title"/>
-          </p:nvPr>
-        </p:nvSpPr>
-        <p:spPr/>
-        <p:txBody>
-          <a:bodyPr/>
-          <a:lstStyle/>
-          <a:p>
-            <a:r>
-              <a:rPr sz="3200" b="1">
-                <a:solidFill>
-                  <a:srgbClr val="CC0066"/>
-                </a:solidFill>
-                <a:latin typeface="Calibri"/>
-              </a:rPr>
-              <a:t>Workspace Files</a:t>
-            </a:r>
-          </a:p>
-        </p:txBody>
-      </p:sp>
-      <p:sp>
-        <p:nvSpPr>
-          <p:cNvPr id="3" name="TextBox 2"/>
-          <p:cNvSpPr txBox="1"/>
-          <p:nvPr/>
-        </p:nvSpPr>
-        <p:spPr>
-          <a:xfrm>
-            <a:off x="822960" y="1417320"/>
-            <a:ext cx="10515600" cy="365760"/>
-          </a:xfrm>
-          <a:prstGeom prst="rect">
-            <a:avLst/>
-          </a:prstGeom>
-          <a:noFill/>
-        </p:spPr>
-        <p:txBody>
-          <a:bodyPr wrap="square" anchor="t" lIns="45720" rIns="45720">
-            <a:spAutoFit/>
-          </a:bodyPr>
-          <a:lstStyle/>
-          <a:p>
-            <a:pPr algn="l"/>
-            <a:r>
-              <a:rPr sz="1500" b="0" i="1">
-                <a:solidFill>
-                  <a:srgbClr val="666666"/>
-                </a:solidFill>
-                <a:latin typeface="Calibri"/>
-              </a:rPr>
-              <a:t>Three config files that shape your build.</a:t>
-            </a:r>
-          </a:p>
-        </p:txBody>
-      </p:sp>
-      <p:sp>
-        <p:nvSpPr>
-          <p:cNvPr id="4" name="Rounded Rectangle 3"/>
-          <p:cNvSpPr/>
-          <p:nvPr/>
-        </p:nvSpPr>
-        <p:spPr>
-          <a:xfrm>
-            <a:off x="822960" y="1783080"/>
-            <a:ext cx="10515600" cy="4389120"/>
-          </a:xfrm>
-          <a:prstGeom prst="roundRect">
-            <a:avLst/>
-          </a:prstGeom>
-          <a:solidFill>
-            <a:srgbClr val="F5F5F5"/>
-          </a:solidFill>
-          <a:ln w="6350">
-            <a:solidFill>
-              <a:srgbClr val="D0D0D0"/>
-            </a:solidFill>
-          </a:ln>
-          <a:effectLst/>
-        </p:spPr>
-        <p:style>
-          <a:lnRef idx="1">
-            <a:schemeClr val="accent1"/>
-          </a:lnRef>
-          <a:fillRef idx="3">
-            <a:schemeClr val="accent1"/>
-          </a:fillRef>
-          <a:effectRef idx="2">
-            <a:schemeClr val="accent1"/>
-          </a:effectRef>
-          <a:fontRef idx="minor">
-            <a:schemeClr val="lt1"/>
-          </a:fontRef>
-        </p:style>
-        <p:txBody>
-          <a:bodyPr rtlCol="0" anchor="ctr"/>
-          <a:lstStyle/>
-          <a:p>
-            <a:pPr algn="ctr"/>
-          </a:p>
-        </p:txBody>
-      </p:sp>
-      <p:sp>
-        <p:nvSpPr>
-          <p:cNvPr id="5" name="Rectangle 4"/>
-          <p:cNvSpPr/>
-          <p:nvPr/>
-        </p:nvSpPr>
-        <p:spPr>
-          <a:xfrm>
-            <a:off x="822960" y="1783080"/>
-            <a:ext cx="73152" cy="4389120"/>
-          </a:xfrm>
-          <a:prstGeom prst="rect">
-            <a:avLst/>
-          </a:prstGeom>
-          <a:solidFill>
-            <a:srgbClr val="CC0066"/>
-          </a:solidFill>
-          <a:ln>
-            <a:noFill/>
-          </a:ln>
-          <a:effectLst/>
-        </p:spPr>
-        <p:style>
-          <a:lnRef idx="1">
-            <a:schemeClr val="accent1"/>
-          </a:lnRef>
-          <a:fillRef idx="3">
-            <a:schemeClr val="accent1"/>
-          </a:fillRef>
-          <a:effectRef idx="2">
-            <a:schemeClr val="accent1"/>
-          </a:effectRef>
-          <a:fontRef idx="minor">
-            <a:schemeClr val="lt1"/>
-          </a:fontRef>
-        </p:style>
-        <p:txBody>
-          <a:bodyPr rtlCol="0" anchor="ctr"/>
-          <a:lstStyle/>
-          <a:p>
-            <a:pPr algn="ctr"/>
-          </a:p>
-        </p:txBody>
-      </p:sp>
-      <p:sp>
-        <p:nvSpPr>
-          <p:cNvPr id="6" name="TextBox 5"/>
-          <p:cNvSpPr txBox="1"/>
-          <p:nvPr/>
-        </p:nvSpPr>
-        <p:spPr>
-          <a:xfrm>
-            <a:off x="1005840" y="1874519"/>
-            <a:ext cx="10241280" cy="4206240"/>
-          </a:xfrm>
-          <a:prstGeom prst="rect">
-            <a:avLst/>
-          </a:prstGeom>
-          <a:noFill/>
-        </p:spPr>
-        <p:txBody>
-          <a:bodyPr wrap="square" lIns="45720" rIns="45720">
-            <a:spAutoFit/>
-          </a:bodyPr>
-          <a:lstStyle/>
-          <a:p>
-            <a:pPr>
-              <a:spcAft>
-                <a:spcPts val="0"/>
-              </a:spcAft>
-            </a:pPr>
-            <a:r>
-              <a:rPr sz="1100">
-                <a:solidFill>
-                  <a:srgbClr val="2D2D2D"/>
-                </a:solidFill>
-                <a:latin typeface="Consolas"/>
-              </a:rPr>
-              <a:t>build/conf/local.conf      # YOUR personal settings</a:t>
-            </a:r>
-          </a:p>
-          <a:p>
-            <a:pPr>
-              <a:spcAft>
-                <a:spcPts val="0"/>
-              </a:spcAft>
-            </a:pPr>
-            <a:r>
-              <a:rPr sz="1100">
-                <a:solidFill>
-                  <a:srgbClr val="2D2D2D"/>
-                </a:solidFill>
-                <a:latin typeface="Consolas"/>
-              </a:rPr>
-              <a:t>  MACHINE = "qemux86-64"</a:t>
-            </a:r>
-          </a:p>
-          <a:p>
-            <a:pPr>
-              <a:spcAft>
-                <a:spcPts val="0"/>
-              </a:spcAft>
-            </a:pPr>
-            <a:r>
-              <a:rPr sz="1100">
-                <a:solidFill>
-                  <a:srgbClr val="2D2D2D"/>
-                </a:solidFill>
-                <a:latin typeface="Consolas"/>
-              </a:rPr>
-              <a:t>  DISTRO = "poky"</a:t>
-            </a:r>
-          </a:p>
-          <a:p>
-            <a:pPr>
-              <a:spcAft>
-                <a:spcPts val="0"/>
-              </a:spcAft>
-            </a:pPr>
-            <a:r>
-              <a:rPr sz="1100">
-                <a:solidFill>
-                  <a:srgbClr val="2D2D2D"/>
-                </a:solidFill>
-                <a:latin typeface="Consolas"/>
-              </a:rPr>
-              <a:t>  PACKAGE_CLASSES = "package_ipk"</a:t>
-            </a:r>
-          </a:p>
-          <a:p>
-            <a:pPr>
-              <a:spcAft>
-                <a:spcPts val="0"/>
-              </a:spcAft>
-            </a:pPr>
-            <a:r>
-              <a:rPr sz="1100">
-                <a:solidFill>
-                  <a:srgbClr val="2D2D2D"/>
-                </a:solidFill>
-                <a:latin typeface="Consolas"/>
-              </a:rPr>
-              <a:t>  DL_DIR = "${HOME}/yocto/downloads"</a:t>
-            </a:r>
-          </a:p>
-          <a:p>
-            <a:pPr>
-              <a:spcAft>
-                <a:spcPts val="0"/>
-              </a:spcAft>
-            </a:pPr>
-            <a:r>
-              <a:rPr sz="1100">
-                <a:solidFill>
-                  <a:srgbClr val="2D2D2D"/>
-                </a:solidFill>
-                <a:latin typeface="Consolas"/>
-              </a:rPr>
-              <a:t>  SSTATE_DIR = "${HOME}/yocto/sstate-cache"</a:t>
-            </a:r>
-          </a:p>
-          <a:p>
-            <a:pPr>
-              <a:spcAft>
-                <a:spcPts val="0"/>
-              </a:spcAft>
-            </a:pPr>
-            <a:r>
-              <a:rPr sz="1100">
-                <a:solidFill>
-                  <a:srgbClr val="2D2D2D"/>
-                </a:solidFill>
-                <a:latin typeface="Consolas"/>
-              </a:rPr>
-              <a:t>  BB_NUMBER_THREADS = "4"</a:t>
-            </a:r>
-          </a:p>
-          <a:p>
-            <a:pPr>
-              <a:spcAft>
-                <a:spcPts val="0"/>
-              </a:spcAft>
-            </a:pPr>
-            <a:r>
-              <a:rPr sz="1100">
-                <a:solidFill>
-                  <a:srgbClr val="2D2D2D"/>
-                </a:solidFill>
-                <a:latin typeface="Consolas"/>
-              </a:rPr>
-              <a:t>  EXTRA_IMAGE_FEATURES = "debug-tweaks ssh-server-openssh"</a:t>
-            </a:r>
-          </a:p>
-          <a:p>
-            <a:pPr>
-              <a:spcAft>
-                <a:spcPts val="0"/>
-              </a:spcAft>
-            </a:pPr>
-            <a:r>
-              <a:rPr sz="1100">
-                <a:solidFill>
-                  <a:srgbClr val="2D2D2D"/>
-                </a:solidFill>
-                <a:latin typeface="Consolas"/>
-              </a:rPr>
-              <a:t> </a:t>
-            </a:r>
-          </a:p>
-          <a:p>
-            <a:pPr>
-              <a:spcAft>
-                <a:spcPts val="0"/>
-              </a:spcAft>
-            </a:pPr>
-            <a:r>
-              <a:rPr sz="1100">
-                <a:solidFill>
-                  <a:srgbClr val="2D2D2D"/>
-                </a:solidFill>
-                <a:latin typeface="Consolas"/>
-              </a:rPr>
-              <a:t>build/conf/bblayers.conf   # Which layers are active</a:t>
-            </a:r>
-          </a:p>
-          <a:p>
-            <a:pPr>
-              <a:spcAft>
-                <a:spcPts val="0"/>
-              </a:spcAft>
-            </a:pPr>
-            <a:r>
-              <a:rPr sz="1100">
-                <a:solidFill>
-                  <a:srgbClr val="2D2D2D"/>
-                </a:solidFill>
-                <a:latin typeface="Consolas"/>
-              </a:rPr>
-              <a:t>  BBLAYERS = " \</a:t>
-            </a:r>
-          </a:p>
-          <a:p>
-            <a:pPr>
-              <a:spcAft>
-                <a:spcPts val="0"/>
-              </a:spcAft>
-            </a:pPr>
-            <a:r>
-              <a:rPr sz="1100">
-                <a:solidFill>
-                  <a:srgbClr val="2D2D2D"/>
-                </a:solidFill>
-                <a:latin typeface="Consolas"/>
-              </a:rPr>
-              <a:t>    ${TOPDIR}/../poky/meta \</a:t>
-            </a:r>
-          </a:p>
-          <a:p>
-            <a:pPr>
-              <a:spcAft>
-                <a:spcPts val="0"/>
-              </a:spcAft>
-            </a:pPr>
-            <a:r>
-              <a:rPr sz="1100">
-                <a:solidFill>
-                  <a:srgbClr val="2D2D2D"/>
-                </a:solidFill>
-                <a:latin typeface="Consolas"/>
-              </a:rPr>
-              <a:t>    ${TOPDIR}/../poky/meta-poky \</a:t>
-            </a:r>
-          </a:p>
-          <a:p>
-            <a:pPr>
-              <a:spcAft>
-                <a:spcPts val="0"/>
-              </a:spcAft>
-            </a:pPr>
-            <a:r>
-              <a:rPr sz="1100">
-                <a:solidFill>
-                  <a:srgbClr val="2D2D2D"/>
-                </a:solidFill>
-                <a:latin typeface="Consolas"/>
-              </a:rPr>
-              <a:t>    ${TOPDIR}/../meta-openembedded/meta-oe \</a:t>
-            </a:r>
-          </a:p>
-          <a:p>
-            <a:pPr>
-              <a:spcAft>
-                <a:spcPts val="0"/>
-              </a:spcAft>
-            </a:pPr>
-            <a:r>
-              <a:rPr sz="1100">
-                <a:solidFill>
-                  <a:srgbClr val="2D2D2D"/>
-                </a:solidFill>
-                <a:latin typeface="Consolas"/>
-              </a:rPr>
-              <a:t>    ${TOPDIR}/../meta-trainerdemo \</a:t>
-            </a:r>
-          </a:p>
-          <a:p>
-            <a:pPr>
-              <a:spcAft>
-                <a:spcPts val="0"/>
-              </a:spcAft>
-            </a:pPr>
-            <a:r>
-              <a:rPr sz="1100">
-                <a:solidFill>
-                  <a:srgbClr val="2D2D2D"/>
-                </a:solidFill>
-                <a:latin typeface="Consolas"/>
-              </a:rPr>
-              <a:t>  "</a:t>
             </a:r>
           </a:p>
         </p:txBody>
